--- a/KITAICHI_自治体向け_概要資料.pptx
+++ b/KITAICHI_自治体向け_概要資料.pptx
@@ -8,6 +8,7 @@
     <p:sldId id="256" r:id="rId7"/>
     <p:sldId id="257" r:id="rId8"/>
     <p:sldId id="258" r:id="rId9"/>
+    <p:sldId id="259" r:id="rId10"/>
   </p:sldIdLst>
   <p:sldSz cx="12191695" cy="6858000" type="screen4x3"/>
   <p:notesSz cx="6858000" cy="9144000"/>
@@ -3143,7 +3144,7 @@
         <p:spPr>
           <a:xfrm>
             <a:off x="0" y="0"/>
-            <a:ext cx="12191695" cy="1737360"/>
+            <a:ext cx="12191695" cy="1920240"/>
           </a:xfrm>
           <a:prstGeom prst="rect">
             <a:avLst/>
@@ -3187,7 +3188,7 @@
         <p:spPr>
           <a:xfrm>
             <a:off x="548640" y="320040"/>
-            <a:ext cx="10972800" cy="548640"/>
+            <a:ext cx="10972800" cy="457200"/>
           </a:xfrm>
           <a:prstGeom prst="rect">
             <a:avLst/>
@@ -3209,13 +3210,13 @@
               </a:spcAft>
             </a:pPr>
             <a:r>
-              <a:rPr sz="1800" b="1">
+              <a:rPr sz="1600" b="1">
                 <a:solidFill>
                   <a:srgbClr val="FFFFFF"/>
                 </a:solidFill>
                 <a:latin typeface="Yu Gothic"/>
               </a:rPr>
-              <a:t>株式会社KITAICHI　ご提案資料</a:t>
+              <a:t>株式会社KITAICHI　ご提案資料（自治体・地域おこし協力隊向け）</a:t>
             </a:r>
           </a:p>
         </p:txBody>
@@ -3228,8 +3229,8 @@
         </p:nvSpPr>
         <p:spPr>
           <a:xfrm>
-            <a:off x="548640" y="777240"/>
-            <a:ext cx="11064240" cy="914400"/>
+            <a:off x="548640" y="822960"/>
+            <a:ext cx="11064240" cy="1005840"/>
           </a:xfrm>
           <a:prstGeom prst="rect">
             <a:avLst/>
@@ -3257,26 +3258,26 @@
                 </a:solidFill>
                 <a:latin typeface="Yu Gothic"/>
               </a:rPr>
-              <a:t>卒業後も地域に残りたい地域おこし協力隊のための</a:t>
-            </a:r>
-          </a:p>
-          <a:p>
-            <a:pPr algn="l">
-              <a:spcBef>
-                <a:spcPts val="0"/>
-              </a:spcBef>
-              <a:spcAft>
-                <a:spcPts val="300"/>
-              </a:spcAft>
-            </a:pPr>
-            <a:r>
-              <a:rPr sz="2600" b="1">
+              <a:t>地域おこし協力隊の挑戦を支える</a:t>
+            </a:r>
+          </a:p>
+          <a:p>
+            <a:pPr algn="l">
+              <a:spcBef>
+                <a:spcPts val="0"/>
+              </a:spcBef>
+              <a:spcAft>
+                <a:spcPts val="300"/>
+              </a:spcAft>
+            </a:pPr>
+            <a:r>
+              <a:rPr sz="2800" b="1">
                 <a:solidFill>
                   <a:srgbClr val="FFFFFF"/>
                 </a:solidFill>
                 <a:latin typeface="Yu Gothic"/>
               </a:rPr>
-              <a:t>定住・起業に向けた伴走支援サポート</a:t>
+              <a:t>クラウドファンディング活用のご提案</a:t>
             </a:r>
           </a:p>
         </p:txBody>
@@ -3289,8 +3290,8 @@
         </p:nvSpPr>
         <p:spPr>
           <a:xfrm>
-            <a:off x="548640" y="1965960"/>
-            <a:ext cx="10972800" cy="457200"/>
+            <a:off x="548640" y="2148840"/>
+            <a:ext cx="7315200" cy="411480"/>
           </a:xfrm>
           <a:prstGeom prst="rect">
             <a:avLst/>
@@ -3314,11 +3315,11 @@
             <a:r>
               <a:rPr sz="1800" b="1">
                 <a:solidFill>
-                  <a:srgbClr val="E06C1F"/>
-                </a:solidFill>
-                <a:latin typeface="Yu Gothic"/>
-              </a:rPr>
-              <a:t>■ こんなお悩みはありませんか？</a:t>
+                  <a:srgbClr val="1F3A5F"/>
+                </a:solidFill>
+                <a:latin typeface="Yu Gothic"/>
+              </a:rPr>
+              <a:t>■ KITAICHIの想い</a:t>
             </a:r>
           </a:p>
         </p:txBody>
@@ -3331,8 +3332,8 @@
         </p:nvSpPr>
         <p:spPr>
           <a:xfrm>
-            <a:off x="548640" y="2468880"/>
-            <a:ext cx="5486400" cy="1554480"/>
+            <a:off x="548640" y="2606040"/>
+            <a:ext cx="6766560" cy="2743200"/>
           </a:xfrm>
           <a:prstGeom prst="roundRect">
             <a:avLst/>
@@ -3362,106 +3363,220 @@
           </a:fontRef>
         </p:style>
         <p:txBody>
-          <a:bodyPr rtlCol="0" anchor="ctr" wrap="square" lIns="101600" rIns="101600" tIns="50800" bIns="50800"/>
-          <a:lstStyle/>
-          <a:p>
-            <a:pPr algn="l">
-              <a:spcBef>
-                <a:spcPts val="0"/>
-              </a:spcBef>
-              <a:spcAft>
-                <a:spcPts val="300"/>
-              </a:spcAft>
-            </a:pPr>
-            <a:r>
-              <a:rPr sz="1400" b="0">
+          <a:bodyPr rtlCol="0" anchor="t" wrap="square" lIns="101600" rIns="101600" tIns="50800" bIns="50800"/>
+          <a:lstStyle/>
+          <a:p>
+            <a:pPr algn="l">
+              <a:spcBef>
+                <a:spcPts val="0"/>
+              </a:spcBef>
+              <a:spcAft>
+                <a:spcPts val="300"/>
+              </a:spcAft>
+            </a:pPr>
+            <a:r>
+              <a:rPr sz="1300" b="0">
                 <a:solidFill>
                   <a:srgbClr val="555555"/>
                 </a:solidFill>
                 <a:latin typeface="Yu Gothic"/>
               </a:rPr>
-              <a:t>・担当職員が多忙で、協力隊の相談先がない</a:t>
-            </a:r>
-          </a:p>
-          <a:p>
-            <a:pPr algn="l">
-              <a:spcBef>
-                <a:spcPts val="0"/>
-              </a:spcBef>
-              <a:spcAft>
-                <a:spcPts val="300"/>
-              </a:spcAft>
-            </a:pPr>
-            <a:r>
-              <a:rPr sz="1400" b="0">
+              <a:t>クラウドファンディングは、単なる資金調達の手段ではなく、</a:t>
+            </a:r>
+          </a:p>
+          <a:p>
+            <a:pPr algn="l">
+              <a:spcBef>
+                <a:spcPts val="0"/>
+              </a:spcBef>
+              <a:spcAft>
+                <a:spcPts val="300"/>
+              </a:spcAft>
+            </a:pPr>
+            <a:r>
+              <a:rPr sz="1300" b="0">
                 <a:solidFill>
                   <a:srgbClr val="555555"/>
                 </a:solidFill>
                 <a:latin typeface="Yu Gothic"/>
               </a:rPr>
-              <a:t>・起業・定住したい協力隊への支援方法が分からない</a:t>
-            </a:r>
-          </a:p>
-          <a:p>
-            <a:pPr algn="l">
-              <a:spcBef>
-                <a:spcPts val="0"/>
-              </a:spcBef>
-              <a:spcAft>
-                <a:spcPts val="300"/>
-              </a:spcAft>
-            </a:pPr>
-            <a:r>
-              <a:rPr sz="1400" b="0">
+              <a:t>地域で新しい挑戦を始める人が応援者と出会い、活動を</a:t>
+            </a:r>
+          </a:p>
+          <a:p>
+            <a:pPr algn="l">
+              <a:spcBef>
+                <a:spcPts val="0"/>
+              </a:spcBef>
+              <a:spcAft>
+                <a:spcPts val="300"/>
+              </a:spcAft>
+            </a:pPr>
+            <a:r>
+              <a:rPr sz="1300" b="0">
                 <a:solidFill>
                   <a:srgbClr val="555555"/>
                 </a:solidFill>
                 <a:latin typeface="Yu Gothic"/>
               </a:rPr>
-              <a:t>・貴重な地域プレイヤーの離脱やSNS炎上などの</a:t>
-            </a:r>
-          </a:p>
-          <a:p>
-            <a:pPr algn="l">
-              <a:spcBef>
-                <a:spcPts val="0"/>
-              </a:spcBef>
-              <a:spcAft>
-                <a:spcPts val="300"/>
-              </a:spcAft>
-            </a:pPr>
-            <a:r>
-              <a:rPr sz="1400" b="0">
+              <a:t>継続していくための「仕組み」だと考えています。</a:t>
+            </a:r>
+          </a:p>
+          <a:p>
+            <a:pPr algn="l">
+              <a:spcBef>
+                <a:spcPts val="0"/>
+              </a:spcBef>
+              <a:spcAft>
+                <a:spcPts val="300"/>
+              </a:spcAft>
+            </a:pPr>
+            <a:r>
+              <a:rPr sz="600" b="0">
                 <a:solidFill>
                   <a:srgbClr val="555555"/>
                 </a:solidFill>
                 <a:latin typeface="Yu Gothic"/>
               </a:rPr>
-              <a:t>　最悪の事態を防ぎたい</a:t>
-            </a:r>
-          </a:p>
-        </p:txBody>
-      </p:sp>
-      <p:sp>
-        <p:nvSpPr>
-          <p:cNvPr id="8" name="Rounded Rectangle 7"/>
+              <a:t/>
+            </a:r>
+          </a:p>
+          <a:p>
+            <a:pPr algn="l">
+              <a:spcBef>
+                <a:spcPts val="0"/>
+              </a:spcBef>
+              <a:spcAft>
+                <a:spcPts val="300"/>
+              </a:spcAft>
+            </a:pPr>
+            <a:r>
+              <a:rPr sz="1300" b="0">
+                <a:solidFill>
+                  <a:srgbClr val="555555"/>
+                </a:solidFill>
+                <a:latin typeface="Yu Gothic"/>
+              </a:rPr>
+              <a:t>協力隊の皆さまは、任期後の起業・事業化・定住に向けて</a:t>
+            </a:r>
+          </a:p>
+          <a:p>
+            <a:pPr algn="l">
+              <a:spcBef>
+                <a:spcPts val="0"/>
+              </a:spcBef>
+              <a:spcAft>
+                <a:spcPts val="300"/>
+              </a:spcAft>
+            </a:pPr>
+            <a:r>
+              <a:rPr sz="1300" b="0">
+                <a:solidFill>
+                  <a:srgbClr val="555555"/>
+                </a:solidFill>
+                <a:latin typeface="Yu Gothic"/>
+              </a:rPr>
+              <a:t>挑戦を始められる存在です。一方で、資金面に加え発信・</a:t>
+            </a:r>
+          </a:p>
+          <a:p>
+            <a:pPr algn="l">
+              <a:spcBef>
+                <a:spcPts val="0"/>
+              </a:spcBef>
+              <a:spcAft>
+                <a:spcPts val="300"/>
+              </a:spcAft>
+            </a:pPr>
+            <a:r>
+              <a:rPr sz="1300" b="0">
+                <a:solidFill>
+                  <a:srgbClr val="555555"/>
+                </a:solidFill>
+                <a:latin typeface="Yu Gothic"/>
+              </a:rPr>
+              <a:t>応援者づくり・実績づくりなど多くの壁に直面します。</a:t>
+            </a:r>
+          </a:p>
+          <a:p>
+            <a:pPr algn="l">
+              <a:spcBef>
+                <a:spcPts val="0"/>
+              </a:spcBef>
+              <a:spcAft>
+                <a:spcPts val="300"/>
+              </a:spcAft>
+            </a:pPr>
+            <a:r>
+              <a:rPr sz="600" b="0">
+                <a:solidFill>
+                  <a:srgbClr val="555555"/>
+                </a:solidFill>
+                <a:latin typeface="Yu Gothic"/>
+              </a:rPr>
+              <a:t/>
+            </a:r>
+          </a:p>
+          <a:p>
+            <a:pPr algn="l">
+              <a:spcBef>
+                <a:spcPts val="0"/>
+              </a:spcBef>
+              <a:spcAft>
+                <a:spcPts val="300"/>
+              </a:spcAft>
+            </a:pPr>
+            <a:r>
+              <a:rPr sz="1300" b="0">
+                <a:solidFill>
+                  <a:srgbClr val="555555"/>
+                </a:solidFill>
+                <a:latin typeface="Yu Gothic"/>
+              </a:rPr>
+              <a:t>本提案は特定サービスの利用を前提とするものではなく、</a:t>
+            </a:r>
+          </a:p>
+          <a:p>
+            <a:pPr algn="l">
+              <a:spcBef>
+                <a:spcPts val="0"/>
+              </a:spcBef>
+              <a:spcAft>
+                <a:spcPts val="300"/>
+              </a:spcAft>
+            </a:pPr>
+            <a:r>
+              <a:rPr sz="1300" b="1">
+                <a:solidFill>
+                  <a:srgbClr val="2E8B57"/>
+                </a:solidFill>
+                <a:latin typeface="Yu Gothic"/>
+              </a:rPr>
+              <a:t>挑戦を始める際の「選択肢」を知っていただく機会です。</a:t>
+            </a:r>
+          </a:p>
+        </p:txBody>
+      </p:sp>
+      <p:sp>
+        <p:nvSpPr>
+          <p:cNvPr id="8" name="Rectangle 7"/>
           <p:cNvSpPr/>
           <p:nvPr/>
         </p:nvSpPr>
         <p:spPr>
           <a:xfrm>
-            <a:off x="6355080" y="2468880"/>
-            <a:ext cx="5257800" cy="1554480"/>
-          </a:xfrm>
-          <a:prstGeom prst="roundRect">
+            <a:off x="7543800" y="2606040"/>
+            <a:ext cx="4069080" cy="2743200"/>
+          </a:xfrm>
+          <a:prstGeom prst="rect">
             <a:avLst/>
           </a:prstGeom>
           <a:solidFill>
-            <a:srgbClr val="FFFFFF"/>
+            <a:srgbClr val="D9E2EC"/>
           </a:solidFill>
-          <a:ln w="12700">
+          <a:ln w="15875">
             <a:solidFill>
-              <a:srgbClr val="1F3A5F"/>
+              <a:srgbClr val="A9BCD0"/>
             </a:solidFill>
           </a:ln>
           <a:effectLst/>
@@ -3484,98 +3599,41 @@
           <a:bodyPr rtlCol="0" anchor="ctr" wrap="square" lIns="101600" rIns="101600" tIns="50800" bIns="50800"/>
           <a:lstStyle/>
           <a:p>
-            <a:pPr algn="l">
-              <a:spcBef>
-                <a:spcPts val="0"/>
-              </a:spcBef>
-              <a:spcAft>
-                <a:spcPts val="300"/>
-              </a:spcAft>
-            </a:pPr>
-            <a:r>
-              <a:rPr sz="1500" b="1">
-                <a:solidFill>
-                  <a:srgbClr val="1F3A5F"/>
-                </a:solidFill>
-                <a:latin typeface="Yu Gothic"/>
-              </a:rPr>
-              <a:t>会社概要</a:t>
-            </a:r>
-          </a:p>
-          <a:p>
-            <a:pPr algn="l">
-              <a:spcBef>
-                <a:spcPts val="0"/>
-              </a:spcBef>
-              <a:spcAft>
-                <a:spcPts val="300"/>
-              </a:spcAft>
-            </a:pPr>
-            <a:r>
-              <a:rPr sz="1200" b="0">
-                <a:solidFill>
-                  <a:srgbClr val="555555"/>
-                </a:solidFill>
-                <a:latin typeface="Yu Gothic"/>
-              </a:rPr>
-              <a:t>株式会社KITAICHI（北海道）／設立：2023年2月</a:t>
-            </a:r>
-          </a:p>
-          <a:p>
-            <a:pPr algn="l">
-              <a:spcBef>
-                <a:spcPts val="0"/>
-              </a:spcBef>
-              <a:spcAft>
-                <a:spcPts val="300"/>
-              </a:spcAft>
-            </a:pPr>
-            <a:r>
-              <a:rPr sz="1200" b="0">
-                <a:solidFill>
-                  <a:srgbClr val="555555"/>
-                </a:solidFill>
-                <a:latin typeface="Yu Gothic"/>
-              </a:rPr>
-              <a:t>代表：佐近 航（さこん わたる）</a:t>
-            </a:r>
-          </a:p>
-          <a:p>
-            <a:pPr algn="l">
-              <a:spcBef>
-                <a:spcPts val="0"/>
-              </a:spcBef>
-              <a:spcAft>
-                <a:spcPts val="300"/>
-              </a:spcAft>
-            </a:pPr>
-            <a:r>
-              <a:rPr sz="1200" b="0">
-                <a:solidFill>
-                  <a:srgbClr val="555555"/>
-                </a:solidFill>
-                <a:latin typeface="Yu Gothic"/>
-              </a:rPr>
-              <a:t>元・夕張市役所で地域再生を担当。地域のプレイヤー</a:t>
-            </a:r>
-          </a:p>
-          <a:p>
-            <a:pPr algn="l">
-              <a:spcBef>
-                <a:spcPts val="0"/>
-              </a:spcBef>
-              <a:spcAft>
-                <a:spcPts val="300"/>
-              </a:spcAft>
-            </a:pPr>
-            <a:r>
-              <a:rPr sz="1200" b="0">
-                <a:solidFill>
-                  <a:srgbClr val="555555"/>
-                </a:solidFill>
-                <a:latin typeface="Yu Gothic"/>
-              </a:rPr>
-              <a:t>不足という課題を解決するため創業しました。</a:t>
+            <a:pPr algn="ctr">
+              <a:spcBef>
+                <a:spcPts val="0"/>
+              </a:spcBef>
+              <a:spcAft>
+                <a:spcPts val="300"/>
+              </a:spcAft>
+            </a:pPr>
+            <a:r>
+              <a:rPr sz="1300" b="1">
+                <a:solidFill>
+                  <a:srgbClr val="6B7B8C"/>
+                </a:solidFill>
+                <a:latin typeface="Yu Gothic"/>
+              </a:rPr>
+              <a:t>［写真枠］</a:t>
+            </a:r>
+          </a:p>
+          <a:p>
+            <a:pPr algn="ctr">
+              <a:spcBef>
+                <a:spcPts val="0"/>
+              </a:spcBef>
+              <a:spcAft>
+                <a:spcPts val="300"/>
+              </a:spcAft>
+            </a:pPr>
+            <a:r>
+              <a:rPr sz="1100" b="0">
+                <a:solidFill>
+                  <a:srgbClr val="6B7B8C"/>
+                </a:solidFill>
+                <a:latin typeface="Yu Gothic"/>
+              </a:rPr>
+              <a:t>代表 佐近／協力隊の活動風景など</a:t>
             </a:r>
           </a:p>
         </p:txBody>
@@ -3588,8 +3646,8 @@
         </p:nvSpPr>
         <p:spPr>
           <a:xfrm>
-            <a:off x="548640" y="4251960"/>
-            <a:ext cx="11064240" cy="868680"/>
+            <a:off x="548640" y="5532120"/>
+            <a:ext cx="11064240" cy="731520"/>
           </a:xfrm>
           <a:prstGeom prst="roundRect">
             <a:avLst/>
@@ -3629,7 +3687,7 @@
               </a:spcAft>
             </a:pPr>
             <a:r>
-              <a:rPr sz="1800" b="1">
+              <a:rPr sz="1700" b="1">
                 <a:solidFill>
                   <a:srgbClr val="FFFFFF"/>
                 </a:solidFill>
@@ -3648,8 +3706,8 @@
         </p:nvSpPr>
         <p:spPr>
           <a:xfrm>
-            <a:off x="548640" y="5303520"/>
-            <a:ext cx="10972800" cy="411480"/>
+            <a:off x="548640" y="6446520"/>
+            <a:ext cx="7315200" cy="320040"/>
           </a:xfrm>
           <a:prstGeom prst="rect">
             <a:avLst/>
@@ -3671,199 +3729,55 @@
               </a:spcAft>
             </a:pPr>
             <a:r>
-              <a:rPr sz="1600" b="1">
-                <a:solidFill>
-                  <a:srgbClr val="1F3A5F"/>
-                </a:solidFill>
-                <a:latin typeface="Yu Gothic"/>
-              </a:rPr>
-              <a:t>■ 事業内容</a:t>
-            </a:r>
-          </a:p>
-        </p:txBody>
-      </p:sp>
-      <p:sp>
-        <p:nvSpPr>
-          <p:cNvPr id="11" name="Rounded Rectangle 10"/>
-          <p:cNvSpPr/>
+              <a:rPr sz="900" b="0">
+                <a:solidFill>
+                  <a:srgbClr val="555555"/>
+                </a:solidFill>
+                <a:latin typeface="Yu Gothic"/>
+              </a:rPr>
+              <a:t>株式会社KITAICHI　地域おこし協力隊向け クラウドファンディング活用のご提案</a:t>
+            </a:r>
+          </a:p>
+        </p:txBody>
+      </p:sp>
+      <p:sp>
+        <p:nvSpPr>
+          <p:cNvPr id="11" name="TextBox 10"/>
+          <p:cNvSpPr txBox="1"/>
           <p:nvPr/>
         </p:nvSpPr>
         <p:spPr>
           <a:xfrm>
-            <a:off x="548640" y="5760720"/>
-            <a:ext cx="3566160" cy="731520"/>
-          </a:xfrm>
-          <a:prstGeom prst="roundRect">
+            <a:off x="10972800" y="6446520"/>
+            <a:ext cx="822960" cy="320040"/>
+          </a:xfrm>
+          <a:prstGeom prst="rect">
             <a:avLst/>
           </a:prstGeom>
-          <a:solidFill>
-            <a:srgbClr val="F0F4F8"/>
-          </a:solidFill>
-          <a:ln w="12700">
-            <a:solidFill>
-              <a:srgbClr val="2E6FB5"/>
-            </a:solidFill>
-          </a:ln>
-          <a:effectLst/>
-        </p:spPr>
-        <p:style>
-          <a:lnRef idx="1">
-            <a:schemeClr val="accent1"/>
-          </a:lnRef>
-          <a:fillRef idx="3">
-            <a:schemeClr val="accent1"/>
-          </a:fillRef>
-          <a:effectRef idx="2">
-            <a:schemeClr val="accent1"/>
-          </a:effectRef>
-          <a:fontRef idx="minor">
-            <a:schemeClr val="lt1"/>
-          </a:fontRef>
-        </p:style>
-        <p:txBody>
-          <a:bodyPr rtlCol="0" anchor="ctr" wrap="square" lIns="101600" rIns="101600" tIns="50800" bIns="50800"/>
-          <a:lstStyle/>
-          <a:p>
-            <a:pPr algn="ctr">
-              <a:spcBef>
-                <a:spcPts val="0"/>
-              </a:spcBef>
-              <a:spcAft>
-                <a:spcPts val="300"/>
-              </a:spcAft>
-            </a:pPr>
-            <a:r>
-              <a:rPr sz="1300" b="1">
-                <a:solidFill>
-                  <a:srgbClr val="1F3A5F"/>
-                </a:solidFill>
-                <a:latin typeface="Yu Gothic"/>
-              </a:rPr>
-              <a:t>伴走型クラウドファンディング支援</a:t>
-            </a:r>
-          </a:p>
-        </p:txBody>
-      </p:sp>
-      <p:sp>
-        <p:nvSpPr>
-          <p:cNvPr id="12" name="Rounded Rectangle 11"/>
-          <p:cNvSpPr/>
-          <p:nvPr/>
-        </p:nvSpPr>
-        <p:spPr>
-          <a:xfrm>
-            <a:off x="4297680" y="5760720"/>
-            <a:ext cx="3566160" cy="731520"/>
-          </a:xfrm>
-          <a:prstGeom prst="roundRect">
-            <a:avLst/>
-          </a:prstGeom>
-          <a:solidFill>
-            <a:srgbClr val="F0F4F8"/>
-          </a:solidFill>
-          <a:ln w="12700">
-            <a:solidFill>
-              <a:srgbClr val="2E6FB5"/>
-            </a:solidFill>
-          </a:ln>
-          <a:effectLst/>
-        </p:spPr>
-        <p:style>
-          <a:lnRef idx="1">
-            <a:schemeClr val="accent1"/>
-          </a:lnRef>
-          <a:fillRef idx="3">
-            <a:schemeClr val="accent1"/>
-          </a:fillRef>
-          <a:effectRef idx="2">
-            <a:schemeClr val="accent1"/>
-          </a:effectRef>
-          <a:fontRef idx="minor">
-            <a:schemeClr val="lt1"/>
-          </a:fontRef>
-        </p:style>
-        <p:txBody>
-          <a:bodyPr rtlCol="0" anchor="ctr" wrap="square" lIns="101600" rIns="101600" tIns="50800" bIns="50800"/>
-          <a:lstStyle/>
-          <a:p>
-            <a:pPr algn="ctr">
-              <a:spcBef>
-                <a:spcPts val="0"/>
-              </a:spcBef>
-              <a:spcAft>
-                <a:spcPts val="300"/>
-              </a:spcAft>
-            </a:pPr>
-            <a:r>
-              <a:rPr sz="1300" b="1">
-                <a:solidFill>
-                  <a:srgbClr val="1F3A5F"/>
-                </a:solidFill>
-                <a:latin typeface="Yu Gothic"/>
-              </a:rPr>
-              <a:t>ふるさと納税型CF支援</a:t>
-            </a:r>
-          </a:p>
-        </p:txBody>
-      </p:sp>
-      <p:sp>
-        <p:nvSpPr>
-          <p:cNvPr id="13" name="Rounded Rectangle 12"/>
-          <p:cNvSpPr/>
-          <p:nvPr/>
-        </p:nvSpPr>
-        <p:spPr>
-          <a:xfrm>
-            <a:off x="8046720" y="5760720"/>
-            <a:ext cx="3566160" cy="731520"/>
-          </a:xfrm>
-          <a:prstGeom prst="roundRect">
-            <a:avLst/>
-          </a:prstGeom>
-          <a:solidFill>
-            <a:srgbClr val="F0F4F8"/>
-          </a:solidFill>
-          <a:ln w="12700">
-            <a:solidFill>
-              <a:srgbClr val="2E6FB5"/>
-            </a:solidFill>
-          </a:ln>
-          <a:effectLst/>
-        </p:spPr>
-        <p:style>
-          <a:lnRef idx="1">
-            <a:schemeClr val="accent1"/>
-          </a:lnRef>
-          <a:fillRef idx="3">
-            <a:schemeClr val="accent1"/>
-          </a:fillRef>
-          <a:effectRef idx="2">
-            <a:schemeClr val="accent1"/>
-          </a:effectRef>
-          <a:fontRef idx="minor">
-            <a:schemeClr val="lt1"/>
-          </a:fontRef>
-        </p:style>
-        <p:txBody>
-          <a:bodyPr rtlCol="0" anchor="ctr" wrap="square" lIns="101600" rIns="101600" tIns="50800" bIns="50800"/>
-          <a:lstStyle/>
-          <a:p>
-            <a:pPr algn="ctr">
-              <a:spcBef>
-                <a:spcPts val="0"/>
-              </a:spcBef>
-              <a:spcAft>
-                <a:spcPts val="300"/>
-              </a:spcAft>
-            </a:pPr>
-            <a:r>
-              <a:rPr sz="1300" b="1">
-                <a:solidFill>
-                  <a:srgbClr val="1F3A5F"/>
-                </a:solidFill>
-                <a:latin typeface="Yu Gothic"/>
-              </a:rPr>
-              <a:t>地域おこし協力隊の活動支援</a:t>
+          <a:noFill/>
+        </p:spPr>
+        <p:txBody>
+          <a:bodyPr wrap="square" anchor="t" lIns="101600" rIns="101600" tIns="50800" bIns="50800">
+            <a:spAutoFit/>
+          </a:bodyPr>
+          <a:lstStyle/>
+          <a:p>
+            <a:pPr algn="r">
+              <a:spcBef>
+                <a:spcPts val="0"/>
+              </a:spcBef>
+              <a:spcAft>
+                <a:spcPts val="300"/>
+              </a:spcAft>
+            </a:pPr>
+            <a:r>
+              <a:rPr sz="1000" b="1">
+                <a:solidFill>
+                  <a:srgbClr val="555555"/>
+                </a:solidFill>
+                <a:latin typeface="Yu Gothic"/>
+              </a:rPr>
+              <a:t>1</a:t>
             </a:r>
           </a:p>
         </p:txBody>
@@ -4011,7 +3925,7 @@
                 </a:solidFill>
                 <a:latin typeface="Yu Gothic"/>
               </a:rPr>
-              <a:t>ご提案内容｜協力隊の定住・起業支援に伴走します</a:t>
+              <a:t>クラウドファンディングの5つのメリット</a:t>
             </a:r>
           </a:p>
         </p:txBody>
@@ -4024,8 +3938,8 @@
         </p:nvSpPr>
         <p:spPr>
           <a:xfrm>
-            <a:off x="548640" y="1097280"/>
-            <a:ext cx="11064240" cy="1188720"/>
+            <a:off x="548640" y="1051560"/>
+            <a:ext cx="11064240" cy="457200"/>
           </a:xfrm>
           <a:prstGeom prst="rect">
             <a:avLst/>
@@ -4053,110 +3967,32 @@
                 </a:solidFill>
                 <a:latin typeface="Yu Gothic"/>
               </a:rPr>
-              <a:t>起業したい協力隊に対し、公益財団法人はまなす財団や商工会等の団体と連携し、事業計画の策定に伴走します。</a:t>
-            </a:r>
-          </a:p>
-          <a:p>
-            <a:pPr algn="l">
-              <a:spcBef>
-                <a:spcPts val="0"/>
-              </a:spcBef>
-              <a:spcAft>
-                <a:spcPts val="300"/>
-              </a:spcAft>
-            </a:pPr>
-            <a:r>
-              <a:rPr sz="1400" b="0">
-                <a:solidFill>
-                  <a:srgbClr val="555555"/>
-                </a:solidFill>
-                <a:latin typeface="Yu Gothic"/>
-              </a:rPr>
-              <a:t>融資・補助金に加え、クラウドファンディングを活用して起業の資金調達とファン獲得に貢献します。</a:t>
-            </a:r>
-          </a:p>
-          <a:p>
-            <a:pPr algn="l">
-              <a:spcBef>
-                <a:spcPts val="0"/>
-              </a:spcBef>
-              <a:spcAft>
-                <a:spcPts val="300"/>
-              </a:spcAft>
-            </a:pPr>
-            <a:r>
-              <a:rPr sz="1500" b="1">
-                <a:solidFill>
-                  <a:srgbClr val="2E8B57"/>
-                </a:solidFill>
-                <a:latin typeface="Yu Gothic"/>
-              </a:rPr>
-              <a:t>→ 地域プレイヤーとして自立し、地域の未来に貢献する人材へ。</a:t>
-            </a:r>
-          </a:p>
-        </p:txBody>
-      </p:sp>
-      <p:sp>
-        <p:nvSpPr>
-          <p:cNvPr id="6" name="TextBox 5"/>
-          <p:cNvSpPr txBox="1"/>
-          <p:nvPr/>
-        </p:nvSpPr>
-        <p:spPr>
-          <a:xfrm>
-            <a:off x="548640" y="2606040"/>
-            <a:ext cx="10972800" cy="411480"/>
-          </a:xfrm>
-          <a:prstGeom prst="rect">
-            <a:avLst/>
-          </a:prstGeom>
-          <a:noFill/>
-        </p:spPr>
-        <p:txBody>
-          <a:bodyPr wrap="square" anchor="t" lIns="101600" rIns="101600" tIns="50800" bIns="50800">
-            <a:spAutoFit/>
-          </a:bodyPr>
-          <a:lstStyle/>
-          <a:p>
-            <a:pPr algn="l">
-              <a:spcBef>
-                <a:spcPts val="0"/>
-              </a:spcBef>
-              <a:spcAft>
-                <a:spcPts val="300"/>
-              </a:spcAft>
-            </a:pPr>
-            <a:r>
-              <a:rPr sz="1800" b="1">
-                <a:solidFill>
-                  <a:srgbClr val="1F3A5F"/>
-                </a:solidFill>
-                <a:latin typeface="Yu Gothic"/>
-              </a:rPr>
-              <a:t>■ ご支援の流れ</a:t>
-            </a:r>
-          </a:p>
-        </p:txBody>
-      </p:sp>
-      <p:sp>
-        <p:nvSpPr>
-          <p:cNvPr id="7" name="Rounded Rectangle 6"/>
+              <a:t>資金調達以外にも、協力隊の活動を後押しするさまざまな効果があります。</a:t>
+            </a:r>
+          </a:p>
+        </p:txBody>
+      </p:sp>
+      <p:sp>
+        <p:nvSpPr>
+          <p:cNvPr id="6" name="Rounded Rectangle 5"/>
           <p:cNvSpPr/>
           <p:nvPr/>
         </p:nvSpPr>
         <p:spPr>
           <a:xfrm>
-            <a:off x="548640" y="3108960"/>
-            <a:ext cx="2468880" cy="1188720"/>
+            <a:off x="548640" y="1645920"/>
+            <a:ext cx="3611880" cy="2103120"/>
           </a:xfrm>
           <a:prstGeom prst="roundRect">
             <a:avLst/>
           </a:prstGeom>
           <a:solidFill>
-            <a:srgbClr val="2E6FB5"/>
+            <a:srgbClr val="FFFFFF"/>
           </a:solidFill>
-          <a:ln>
-            <a:noFill/>
+          <a:ln w="15875">
+            <a:solidFill>
+              <a:srgbClr val="2E6FB5"/>
+            </a:solidFill>
           </a:ln>
           <a:effectLst/>
         </p:spPr>
@@ -4175,109 +4011,88 @@
           </a:fontRef>
         </p:style>
         <p:txBody>
-          <a:bodyPr rtlCol="0" anchor="ctr" wrap="square" lIns="101600" rIns="101600" tIns="50800" bIns="50800"/>
-          <a:lstStyle/>
-          <a:p>
-            <a:pPr algn="ctr">
-              <a:spcBef>
-                <a:spcPts val="0"/>
-              </a:spcBef>
-              <a:spcAft>
-                <a:spcPts val="300"/>
-              </a:spcAft>
-            </a:pPr>
-            <a:r>
-              <a:rPr sz="1500" b="1">
-                <a:solidFill>
-                  <a:srgbClr val="FFFFFF"/>
-                </a:solidFill>
-                <a:latin typeface="Yu Gothic"/>
-              </a:rPr>
-              <a:t>ヒアリング</a:t>
-            </a:r>
-          </a:p>
-          <a:p>
-            <a:pPr algn="ctr">
-              <a:spcBef>
-                <a:spcPts val="0"/>
-              </a:spcBef>
-              <a:spcAft>
-                <a:spcPts val="300"/>
-              </a:spcAft>
-            </a:pPr>
-            <a:r>
-              <a:rPr sz="1500" b="1">
-                <a:solidFill>
-                  <a:srgbClr val="FFFFFF"/>
-                </a:solidFill>
-                <a:latin typeface="Yu Gothic"/>
-              </a:rPr>
-              <a:t>相談対応</a:t>
-            </a:r>
-          </a:p>
-        </p:txBody>
-      </p:sp>
-      <p:sp>
-        <p:nvSpPr>
-          <p:cNvPr id="8" name="TextBox 7"/>
-          <p:cNvSpPr txBox="1"/>
-          <p:nvPr/>
-        </p:nvSpPr>
-        <p:spPr>
-          <a:xfrm>
-            <a:off x="3017520" y="3108960"/>
-            <a:ext cx="411480" cy="1188720"/>
-          </a:xfrm>
-          <a:prstGeom prst="rect">
-            <a:avLst/>
-          </a:prstGeom>
-          <a:noFill/>
-        </p:spPr>
-        <p:txBody>
-          <a:bodyPr wrap="square" anchor="ctr" lIns="101600" rIns="101600" tIns="50800" bIns="50800">
-            <a:spAutoFit/>
-          </a:bodyPr>
-          <a:lstStyle/>
-          <a:p>
-            <a:pPr algn="ctr">
-              <a:spcBef>
-                <a:spcPts val="0"/>
-              </a:spcBef>
-              <a:spcAft>
-                <a:spcPts val="300"/>
-              </a:spcAft>
-            </a:pPr>
-            <a:r>
-              <a:rPr sz="2000" b="1">
-                <a:solidFill>
-                  <a:srgbClr val="1F3A5F"/>
-                </a:solidFill>
-                <a:latin typeface="Yu Gothic"/>
-              </a:rPr>
-              <a:t>▶</a:t>
-            </a:r>
-          </a:p>
-        </p:txBody>
-      </p:sp>
-      <p:sp>
-        <p:nvSpPr>
-          <p:cNvPr id="9" name="Rounded Rectangle 8"/>
+          <a:bodyPr rtlCol="0" anchor="t" wrap="square" lIns="101600" rIns="101600" tIns="50800" bIns="50800"/>
+          <a:lstStyle/>
+          <a:p>
+            <a:pPr algn="l">
+              <a:spcBef>
+                <a:spcPts val="0"/>
+              </a:spcBef>
+              <a:spcAft>
+                <a:spcPts val="300"/>
+              </a:spcAft>
+            </a:pPr>
+            <a:r>
+              <a:rPr sz="1400" b="1">
+                <a:solidFill>
+                  <a:srgbClr val="2E6FB5"/>
+                </a:solidFill>
+                <a:latin typeface="Yu Gothic"/>
+              </a:rPr>
+              <a:t>① 活動を知ってもらうきっかけ</a:t>
+            </a:r>
+          </a:p>
+          <a:p>
+            <a:pPr algn="l">
+              <a:spcBef>
+                <a:spcPts val="0"/>
+              </a:spcBef>
+              <a:spcAft>
+                <a:spcPts val="300"/>
+              </a:spcAft>
+            </a:pPr>
+            <a:r>
+              <a:rPr sz="600" b="0">
+                <a:solidFill>
+                  <a:srgbClr val="555555"/>
+                </a:solidFill>
+                <a:latin typeface="Yu Gothic"/>
+              </a:rPr>
+              <a:t/>
+            </a:r>
+          </a:p>
+          <a:p>
+            <a:pPr algn="l">
+              <a:spcBef>
+                <a:spcPts val="0"/>
+              </a:spcBef>
+              <a:spcAft>
+                <a:spcPts val="300"/>
+              </a:spcAft>
+            </a:pPr>
+            <a:r>
+              <a:rPr sz="1200" b="0">
+                <a:solidFill>
+                  <a:srgbClr val="555555"/>
+                </a:solidFill>
+                <a:latin typeface="Yu Gothic"/>
+              </a:rPr>
+              <a:t>想いをページに整理して発信し、これまで接点のなかった人にも取り組みを知ってもらえます。</a:t>
+            </a:r>
+          </a:p>
+        </p:txBody>
+      </p:sp>
+      <p:sp>
+        <p:nvSpPr>
+          <p:cNvPr id="7" name="Rounded Rectangle 6"/>
           <p:cNvSpPr/>
           <p:nvPr/>
         </p:nvSpPr>
         <p:spPr>
           <a:xfrm>
-            <a:off x="3429000" y="3108960"/>
-            <a:ext cx="2468880" cy="1188720"/>
+            <a:off x="4297680" y="1645920"/>
+            <a:ext cx="3611880" cy="2103120"/>
           </a:xfrm>
           <a:prstGeom prst="roundRect">
             <a:avLst/>
           </a:prstGeom>
           <a:solidFill>
-            <a:srgbClr val="2E6FB5"/>
+            <a:srgbClr val="FFFFFF"/>
           </a:solidFill>
-          <a:ln>
-            <a:noFill/>
+          <a:ln w="15875">
+            <a:solidFill>
+              <a:srgbClr val="2E6FB5"/>
+            </a:solidFill>
           </a:ln>
           <a:effectLst/>
         </p:spPr>
@@ -4296,109 +4111,88 @@
           </a:fontRef>
         </p:style>
         <p:txBody>
-          <a:bodyPr rtlCol="0" anchor="ctr" wrap="square" lIns="101600" rIns="101600" tIns="50800" bIns="50800"/>
-          <a:lstStyle/>
-          <a:p>
-            <a:pPr algn="ctr">
-              <a:spcBef>
-                <a:spcPts val="0"/>
-              </a:spcBef>
-              <a:spcAft>
-                <a:spcPts val="300"/>
-              </a:spcAft>
-            </a:pPr>
-            <a:r>
-              <a:rPr sz="1500" b="1">
-                <a:solidFill>
-                  <a:srgbClr val="FFFFFF"/>
-                </a:solidFill>
-                <a:latin typeface="Yu Gothic"/>
-              </a:rPr>
-              <a:t>事業計画の</a:t>
-            </a:r>
-          </a:p>
-          <a:p>
-            <a:pPr algn="ctr">
-              <a:spcBef>
-                <a:spcPts val="0"/>
-              </a:spcBef>
-              <a:spcAft>
-                <a:spcPts val="300"/>
-              </a:spcAft>
-            </a:pPr>
-            <a:r>
-              <a:rPr sz="1500" b="1">
-                <a:solidFill>
-                  <a:srgbClr val="FFFFFF"/>
-                </a:solidFill>
-                <a:latin typeface="Yu Gothic"/>
-              </a:rPr>
-              <a:t>策定支援</a:t>
-            </a:r>
-          </a:p>
-        </p:txBody>
-      </p:sp>
-      <p:sp>
-        <p:nvSpPr>
-          <p:cNvPr id="10" name="TextBox 9"/>
-          <p:cNvSpPr txBox="1"/>
-          <p:nvPr/>
-        </p:nvSpPr>
-        <p:spPr>
-          <a:xfrm>
-            <a:off x="5897880" y="3108960"/>
-            <a:ext cx="411480" cy="1188720"/>
-          </a:xfrm>
-          <a:prstGeom prst="rect">
-            <a:avLst/>
-          </a:prstGeom>
-          <a:noFill/>
-        </p:spPr>
-        <p:txBody>
-          <a:bodyPr wrap="square" anchor="ctr" lIns="101600" rIns="101600" tIns="50800" bIns="50800">
-            <a:spAutoFit/>
-          </a:bodyPr>
-          <a:lstStyle/>
-          <a:p>
-            <a:pPr algn="ctr">
-              <a:spcBef>
-                <a:spcPts val="0"/>
-              </a:spcBef>
-              <a:spcAft>
-                <a:spcPts val="300"/>
-              </a:spcAft>
-            </a:pPr>
-            <a:r>
-              <a:rPr sz="2000" b="1">
-                <a:solidFill>
-                  <a:srgbClr val="1F3A5F"/>
-                </a:solidFill>
-                <a:latin typeface="Yu Gothic"/>
-              </a:rPr>
-              <a:t>▶</a:t>
-            </a:r>
-          </a:p>
-        </p:txBody>
-      </p:sp>
-      <p:sp>
-        <p:nvSpPr>
-          <p:cNvPr id="11" name="Rounded Rectangle 10"/>
+          <a:bodyPr rtlCol="0" anchor="t" wrap="square" lIns="101600" rIns="101600" tIns="50800" bIns="50800"/>
+          <a:lstStyle/>
+          <a:p>
+            <a:pPr algn="l">
+              <a:spcBef>
+                <a:spcPts val="0"/>
+              </a:spcBef>
+              <a:spcAft>
+                <a:spcPts val="300"/>
+              </a:spcAft>
+            </a:pPr>
+            <a:r>
+              <a:rPr sz="1400" b="1">
+                <a:solidFill>
+                  <a:srgbClr val="2E6FB5"/>
+                </a:solidFill>
+                <a:latin typeface="Yu Gothic"/>
+              </a:rPr>
+              <a:t>② 応援者・ファンづくり</a:t>
+            </a:r>
+          </a:p>
+          <a:p>
+            <a:pPr algn="l">
+              <a:spcBef>
+                <a:spcPts val="0"/>
+              </a:spcBef>
+              <a:spcAft>
+                <a:spcPts val="300"/>
+              </a:spcAft>
+            </a:pPr>
+            <a:r>
+              <a:rPr sz="600" b="0">
+                <a:solidFill>
+                  <a:srgbClr val="555555"/>
+                </a:solidFill>
+                <a:latin typeface="Yu Gothic"/>
+              </a:rPr>
+              <a:t/>
+            </a:r>
+          </a:p>
+          <a:p>
+            <a:pPr algn="l">
+              <a:spcBef>
+                <a:spcPts val="0"/>
+              </a:spcBef>
+              <a:spcAft>
+                <a:spcPts val="300"/>
+              </a:spcAft>
+            </a:pPr>
+            <a:r>
+              <a:rPr sz="1200" b="0">
+                <a:solidFill>
+                  <a:srgbClr val="555555"/>
+                </a:solidFill>
+                <a:latin typeface="Yu Gothic"/>
+              </a:rPr>
+              <a:t>支援者は背景や想いに共感する応援者。任期後の活動を支えるファンづくりにつながります。</a:t>
+            </a:r>
+          </a:p>
+        </p:txBody>
+      </p:sp>
+      <p:sp>
+        <p:nvSpPr>
+          <p:cNvPr id="8" name="Rounded Rectangle 7"/>
           <p:cNvSpPr/>
           <p:nvPr/>
         </p:nvSpPr>
         <p:spPr>
           <a:xfrm>
-            <a:off x="6309360" y="3108960"/>
-            <a:ext cx="2468880" cy="1188720"/>
+            <a:off x="8046720" y="1645920"/>
+            <a:ext cx="3566160" cy="2103120"/>
           </a:xfrm>
           <a:prstGeom prst="roundRect">
             <a:avLst/>
           </a:prstGeom>
           <a:solidFill>
-            <a:srgbClr val="2E6FB5"/>
+            <a:srgbClr val="FFFFFF"/>
           </a:solidFill>
-          <a:ln>
-            <a:noFill/>
+          <a:ln w="15875">
+            <a:solidFill>
+              <a:srgbClr val="2E6FB5"/>
+            </a:solidFill>
           </a:ln>
           <a:effectLst/>
         </p:spPr>
@@ -4417,128 +4211,88 @@
           </a:fontRef>
         </p:style>
         <p:txBody>
-          <a:bodyPr rtlCol="0" anchor="ctr" wrap="square" lIns="101600" rIns="101600" tIns="50800" bIns="50800"/>
-          <a:lstStyle/>
-          <a:p>
-            <a:pPr algn="ctr">
-              <a:spcBef>
-                <a:spcPts val="0"/>
-              </a:spcBef>
-              <a:spcAft>
-                <a:spcPts val="300"/>
-              </a:spcAft>
-            </a:pPr>
-            <a:r>
-              <a:rPr sz="1500" b="1">
-                <a:solidFill>
-                  <a:srgbClr val="FFFFFF"/>
-                </a:solidFill>
-                <a:latin typeface="Yu Gothic"/>
-              </a:rPr>
-              <a:t>クラウド</a:t>
-            </a:r>
-          </a:p>
-          <a:p>
-            <a:pPr algn="ctr">
-              <a:spcBef>
-                <a:spcPts val="0"/>
-              </a:spcBef>
-              <a:spcAft>
-                <a:spcPts val="300"/>
-              </a:spcAft>
-            </a:pPr>
-            <a:r>
-              <a:rPr sz="1500" b="1">
-                <a:solidFill>
-                  <a:srgbClr val="FFFFFF"/>
-                </a:solidFill>
-                <a:latin typeface="Yu Gothic"/>
-              </a:rPr>
-              <a:t>ファンディング</a:t>
-            </a:r>
-          </a:p>
-          <a:p>
-            <a:pPr algn="ctr">
-              <a:spcBef>
-                <a:spcPts val="0"/>
-              </a:spcBef>
-              <a:spcAft>
-                <a:spcPts val="300"/>
-              </a:spcAft>
-            </a:pPr>
-            <a:r>
-              <a:rPr sz="1500" b="1">
-                <a:solidFill>
-                  <a:srgbClr val="FFFFFF"/>
-                </a:solidFill>
-                <a:latin typeface="Yu Gothic"/>
-              </a:rPr>
-              <a:t>伴走支援</a:t>
-            </a:r>
-          </a:p>
-        </p:txBody>
-      </p:sp>
-      <p:sp>
-        <p:nvSpPr>
-          <p:cNvPr id="12" name="TextBox 11"/>
-          <p:cNvSpPr txBox="1"/>
-          <p:nvPr/>
-        </p:nvSpPr>
-        <p:spPr>
-          <a:xfrm>
-            <a:off x="8778240" y="3108960"/>
-            <a:ext cx="411480" cy="1188720"/>
-          </a:xfrm>
-          <a:prstGeom prst="rect">
-            <a:avLst/>
-          </a:prstGeom>
-          <a:noFill/>
-        </p:spPr>
-        <p:txBody>
-          <a:bodyPr wrap="square" anchor="ctr" lIns="101600" rIns="101600" tIns="50800" bIns="50800">
-            <a:spAutoFit/>
-          </a:bodyPr>
-          <a:lstStyle/>
-          <a:p>
-            <a:pPr algn="ctr">
-              <a:spcBef>
-                <a:spcPts val="0"/>
-              </a:spcBef>
-              <a:spcAft>
-                <a:spcPts val="300"/>
-              </a:spcAft>
-            </a:pPr>
-            <a:r>
-              <a:rPr sz="2000" b="1">
-                <a:solidFill>
-                  <a:srgbClr val="1F3A5F"/>
-                </a:solidFill>
-                <a:latin typeface="Yu Gothic"/>
-              </a:rPr>
-              <a:t>▶</a:t>
-            </a:r>
-          </a:p>
-        </p:txBody>
-      </p:sp>
-      <p:sp>
-        <p:nvSpPr>
-          <p:cNvPr id="13" name="Rounded Rectangle 12"/>
+          <a:bodyPr rtlCol="0" anchor="t" wrap="square" lIns="101600" rIns="101600" tIns="50800" bIns="50800"/>
+          <a:lstStyle/>
+          <a:p>
+            <a:pPr algn="l">
+              <a:spcBef>
+                <a:spcPts val="0"/>
+              </a:spcBef>
+              <a:spcAft>
+                <a:spcPts val="300"/>
+              </a:spcAft>
+            </a:pPr>
+            <a:r>
+              <a:rPr sz="1400" b="1">
+                <a:solidFill>
+                  <a:srgbClr val="2E6FB5"/>
+                </a:solidFill>
+                <a:latin typeface="Yu Gothic"/>
+              </a:rPr>
+              <a:t>③ ニーズの確認（テスト）</a:t>
+            </a:r>
+          </a:p>
+          <a:p>
+            <a:pPr algn="l">
+              <a:spcBef>
+                <a:spcPts val="0"/>
+              </a:spcBef>
+              <a:spcAft>
+                <a:spcPts val="300"/>
+              </a:spcAft>
+            </a:pPr>
+            <a:r>
+              <a:rPr sz="600" b="0">
+                <a:solidFill>
+                  <a:srgbClr val="555555"/>
+                </a:solidFill>
+                <a:latin typeface="Yu Gothic"/>
+              </a:rPr>
+              <a:t/>
+            </a:r>
+          </a:p>
+          <a:p>
+            <a:pPr algn="l">
+              <a:spcBef>
+                <a:spcPts val="0"/>
+              </a:spcBef>
+              <a:spcAft>
+                <a:spcPts val="300"/>
+              </a:spcAft>
+            </a:pPr>
+            <a:r>
+              <a:rPr sz="1200" b="0">
+                <a:solidFill>
+                  <a:srgbClr val="555555"/>
+                </a:solidFill>
+                <a:latin typeface="Yu Gothic"/>
+              </a:rPr>
+              <a:t>支援が集まるかを通じて地域内外の反応を確認。事業化前のテストマーケティングにも。</a:t>
+            </a:r>
+          </a:p>
+        </p:txBody>
+      </p:sp>
+      <p:sp>
+        <p:nvSpPr>
+          <p:cNvPr id="9" name="Rounded Rectangle 8"/>
           <p:cNvSpPr/>
           <p:nvPr/>
         </p:nvSpPr>
         <p:spPr>
           <a:xfrm>
-            <a:off x="9189720" y="3108960"/>
-            <a:ext cx="2468880" cy="1188720"/>
+            <a:off x="548640" y="3977639"/>
+            <a:ext cx="3611880" cy="2103120"/>
           </a:xfrm>
           <a:prstGeom prst="roundRect">
             <a:avLst/>
           </a:prstGeom>
           <a:solidFill>
-            <a:srgbClr val="2E8B57"/>
+            <a:srgbClr val="FFFFFF"/>
           </a:solidFill>
-          <a:ln>
-            <a:noFill/>
+          <a:ln w="15875">
+            <a:solidFill>
+              <a:srgbClr val="2E6FB5"/>
+            </a:solidFill>
           </a:ln>
           <a:effectLst/>
         </p:spPr>
@@ -4557,47 +4311,85 @@
           </a:fontRef>
         </p:style>
         <p:txBody>
-          <a:bodyPr rtlCol="0" anchor="ctr" wrap="square" lIns="101600" rIns="101600" tIns="50800" bIns="50800"/>
-          <a:lstStyle/>
-          <a:p>
-            <a:pPr algn="ctr">
-              <a:spcBef>
-                <a:spcPts val="0"/>
-              </a:spcBef>
-              <a:spcAft>
-                <a:spcPts val="300"/>
-              </a:spcAft>
-            </a:pPr>
-            <a:r>
-              <a:rPr sz="1500" b="1">
-                <a:solidFill>
-                  <a:srgbClr val="FFFFFF"/>
-                </a:solidFill>
-                <a:latin typeface="Yu Gothic"/>
-              </a:rPr>
-              <a:t>起業の実現</a:t>
-            </a:r>
-          </a:p>
-        </p:txBody>
-      </p:sp>
-      <p:sp>
-        <p:nvSpPr>
-          <p:cNvPr id="14" name="Rounded Rectangle 13"/>
+          <a:bodyPr rtlCol="0" anchor="t" wrap="square" lIns="101600" rIns="101600" tIns="50800" bIns="50800"/>
+          <a:lstStyle/>
+          <a:p>
+            <a:pPr algn="l">
+              <a:spcBef>
+                <a:spcPts val="0"/>
+              </a:spcBef>
+              <a:spcAft>
+                <a:spcPts val="300"/>
+              </a:spcAft>
+            </a:pPr>
+            <a:r>
+              <a:rPr sz="1400" b="1">
+                <a:solidFill>
+                  <a:srgbClr val="2E6FB5"/>
+                </a:solidFill>
+                <a:latin typeface="Yu Gothic"/>
+              </a:rPr>
+              <a:t>④ 地域内の協力者を増やす</a:t>
+            </a:r>
+          </a:p>
+          <a:p>
+            <a:pPr algn="l">
+              <a:spcBef>
+                <a:spcPts val="0"/>
+              </a:spcBef>
+              <a:spcAft>
+                <a:spcPts val="300"/>
+              </a:spcAft>
+            </a:pPr>
+            <a:r>
+              <a:rPr sz="600" b="0">
+                <a:solidFill>
+                  <a:srgbClr val="555555"/>
+                </a:solidFill>
+                <a:latin typeface="Yu Gothic"/>
+              </a:rPr>
+              <a:t/>
+            </a:r>
+          </a:p>
+          <a:p>
+            <a:pPr algn="l">
+              <a:spcBef>
+                <a:spcPts val="0"/>
+              </a:spcBef>
+              <a:spcAft>
+                <a:spcPts val="300"/>
+              </a:spcAft>
+            </a:pPr>
+            <a:r>
+              <a:rPr sz="1200" b="0">
+                <a:solidFill>
+                  <a:srgbClr val="555555"/>
+                </a:solidFill>
+                <a:latin typeface="Yu Gothic"/>
+              </a:rPr>
+              <a:t>公開の過程で事業者・自治体・住民・関係団体との連携が生まれるコミュニケーションツール。</a:t>
+            </a:r>
+          </a:p>
+        </p:txBody>
+      </p:sp>
+      <p:sp>
+        <p:nvSpPr>
+          <p:cNvPr id="10" name="Rounded Rectangle 9"/>
           <p:cNvSpPr/>
           <p:nvPr/>
         </p:nvSpPr>
         <p:spPr>
           <a:xfrm>
-            <a:off x="548640" y="4572000"/>
-            <a:ext cx="11064240" cy="1463040"/>
+            <a:off x="4297680" y="3977639"/>
+            <a:ext cx="3611880" cy="2103120"/>
           </a:xfrm>
           <a:prstGeom prst="roundRect">
             <a:avLst/>
           </a:prstGeom>
           <a:solidFill>
-            <a:srgbClr val="F0F4F8"/>
+            <a:srgbClr val="FFFFFF"/>
           </a:solidFill>
-          <a:ln w="12700">
+          <a:ln w="15875">
             <a:solidFill>
               <a:srgbClr val="2E6FB5"/>
             </a:solidFill>
@@ -4619,82 +4411,228 @@
           </a:fontRef>
         </p:style>
         <p:txBody>
+          <a:bodyPr rtlCol="0" anchor="t" wrap="square" lIns="101600" rIns="101600" tIns="50800" bIns="50800"/>
+          <a:lstStyle/>
+          <a:p>
+            <a:pPr algn="l">
+              <a:spcBef>
+                <a:spcPts val="0"/>
+              </a:spcBef>
+              <a:spcAft>
+                <a:spcPts val="300"/>
+              </a:spcAft>
+            </a:pPr>
+            <a:r>
+              <a:rPr sz="1400" b="1">
+                <a:solidFill>
+                  <a:srgbClr val="2E6FB5"/>
+                </a:solidFill>
+                <a:latin typeface="Yu Gothic"/>
+              </a:rPr>
+              <a:t>⑤ 任期後に向けた初期実績</a:t>
+            </a:r>
+          </a:p>
+          <a:p>
+            <a:pPr algn="l">
+              <a:spcBef>
+                <a:spcPts val="0"/>
+              </a:spcBef>
+              <a:spcAft>
+                <a:spcPts val="300"/>
+              </a:spcAft>
+            </a:pPr>
+            <a:r>
+              <a:rPr sz="600" b="0">
+                <a:solidFill>
+                  <a:srgbClr val="555555"/>
+                </a:solidFill>
+                <a:latin typeface="Yu Gothic"/>
+              </a:rPr>
+              <a:t/>
+            </a:r>
+          </a:p>
+          <a:p>
+            <a:pPr algn="l">
+              <a:spcBef>
+                <a:spcPts val="0"/>
+              </a:spcBef>
+              <a:spcAft>
+                <a:spcPts val="300"/>
+              </a:spcAft>
+            </a:pPr>
+            <a:r>
+              <a:rPr sz="1200" b="0">
+                <a:solidFill>
+                  <a:srgbClr val="555555"/>
+                </a:solidFill>
+                <a:latin typeface="Yu Gothic"/>
+              </a:rPr>
+              <a:t>資金に加え、支援者数・反応・メディア掲載・協力体制など任期後につながる実績に。</a:t>
+            </a:r>
+          </a:p>
+        </p:txBody>
+      </p:sp>
+      <p:sp>
+        <p:nvSpPr>
+          <p:cNvPr id="11" name="Rectangle 10"/>
+          <p:cNvSpPr/>
+          <p:nvPr/>
+        </p:nvSpPr>
+        <p:spPr>
+          <a:xfrm>
+            <a:off x="8046720" y="3977639"/>
+            <a:ext cx="3566160" cy="2103120"/>
+          </a:xfrm>
+          <a:prstGeom prst="rect">
+            <a:avLst/>
+          </a:prstGeom>
+          <a:solidFill>
+            <a:srgbClr val="D9E2EC"/>
+          </a:solidFill>
+          <a:ln w="15875">
+            <a:solidFill>
+              <a:srgbClr val="A9BCD0"/>
+            </a:solidFill>
+          </a:ln>
+          <a:effectLst/>
+        </p:spPr>
+        <p:style>
+          <a:lnRef idx="1">
+            <a:schemeClr val="accent1"/>
+          </a:lnRef>
+          <a:fillRef idx="3">
+            <a:schemeClr val="accent1"/>
+          </a:fillRef>
+          <a:effectRef idx="2">
+            <a:schemeClr val="accent1"/>
+          </a:effectRef>
+          <a:fontRef idx="minor">
+            <a:schemeClr val="lt1"/>
+          </a:fontRef>
+        </p:style>
+        <p:txBody>
           <a:bodyPr rtlCol="0" anchor="ctr" wrap="square" lIns="101600" rIns="101600" tIns="50800" bIns="50800"/>
           <a:lstStyle/>
           <a:p>
-            <a:pPr algn="l">
-              <a:spcBef>
-                <a:spcPts val="0"/>
-              </a:spcBef>
-              <a:spcAft>
-                <a:spcPts val="300"/>
-              </a:spcAft>
-            </a:pPr>
-            <a:r>
-              <a:rPr sz="1500" b="1">
-                <a:solidFill>
-                  <a:srgbClr val="E06C1F"/>
-                </a:solidFill>
-                <a:latin typeface="Yu Gothic"/>
-              </a:rPr>
-              <a:t>ポイント</a:t>
-            </a:r>
-          </a:p>
-          <a:p>
-            <a:pPr algn="l">
-              <a:spcBef>
-                <a:spcPts val="0"/>
-              </a:spcBef>
-              <a:spcAft>
-                <a:spcPts val="300"/>
-              </a:spcAft>
-            </a:pPr>
-            <a:r>
-              <a:rPr sz="1400" b="0">
+            <a:pPr algn="ctr">
+              <a:spcBef>
+                <a:spcPts val="0"/>
+              </a:spcBef>
+              <a:spcAft>
+                <a:spcPts val="300"/>
+              </a:spcAft>
+            </a:pPr>
+            <a:r>
+              <a:rPr sz="1300" b="1">
+                <a:solidFill>
+                  <a:srgbClr val="6B7B8C"/>
+                </a:solidFill>
+                <a:latin typeface="Yu Gothic"/>
+              </a:rPr>
+              <a:t>［写真枠］</a:t>
+            </a:r>
+          </a:p>
+          <a:p>
+            <a:pPr algn="ctr">
+              <a:spcBef>
+                <a:spcPts val="0"/>
+              </a:spcBef>
+              <a:spcAft>
+                <a:spcPts val="300"/>
+              </a:spcAft>
+            </a:pPr>
+            <a:r>
+              <a:rPr sz="1100" b="0">
+                <a:solidFill>
+                  <a:srgbClr val="6B7B8C"/>
+                </a:solidFill>
+                <a:latin typeface="Yu Gothic"/>
+              </a:rPr>
+              <a:t>プロジェクトページ／支援者との交流</a:t>
+            </a:r>
+          </a:p>
+        </p:txBody>
+      </p:sp>
+      <p:sp>
+        <p:nvSpPr>
+          <p:cNvPr id="12" name="TextBox 11"/>
+          <p:cNvSpPr txBox="1"/>
+          <p:nvPr/>
+        </p:nvSpPr>
+        <p:spPr>
+          <a:xfrm>
+            <a:off x="548640" y="6446520"/>
+            <a:ext cx="7315200" cy="320040"/>
+          </a:xfrm>
+          <a:prstGeom prst="rect">
+            <a:avLst/>
+          </a:prstGeom>
+          <a:noFill/>
+        </p:spPr>
+        <p:txBody>
+          <a:bodyPr wrap="square" anchor="t" lIns="101600" rIns="101600" tIns="50800" bIns="50800">
+            <a:spAutoFit/>
+          </a:bodyPr>
+          <a:lstStyle/>
+          <a:p>
+            <a:pPr algn="l">
+              <a:spcBef>
+                <a:spcPts val="0"/>
+              </a:spcBef>
+              <a:spcAft>
+                <a:spcPts val="300"/>
+              </a:spcAft>
+            </a:pPr>
+            <a:r>
+              <a:rPr sz="900" b="0">
                 <a:solidFill>
                   <a:srgbClr val="555555"/>
                 </a:solidFill>
                 <a:latin typeface="Yu Gothic"/>
               </a:rPr>
-              <a:t>・各自治体様のご状況を踏まえ、サポート内容を柔軟にご提案いたします。</a:t>
-            </a:r>
-          </a:p>
-          <a:p>
-            <a:pPr algn="l">
-              <a:spcBef>
-                <a:spcPts val="0"/>
-              </a:spcBef>
-              <a:spcAft>
-                <a:spcPts val="300"/>
-              </a:spcAft>
-            </a:pPr>
-            <a:r>
-              <a:rPr sz="1400" b="0">
+              <a:t>株式会社KITAICHI　地域おこし協力隊向け クラウドファンディング活用のご提案</a:t>
+            </a:r>
+          </a:p>
+        </p:txBody>
+      </p:sp>
+      <p:sp>
+        <p:nvSpPr>
+          <p:cNvPr id="13" name="TextBox 12"/>
+          <p:cNvSpPr txBox="1"/>
+          <p:nvPr/>
+        </p:nvSpPr>
+        <p:spPr>
+          <a:xfrm>
+            <a:off x="10972800" y="6446520"/>
+            <a:ext cx="822960" cy="320040"/>
+          </a:xfrm>
+          <a:prstGeom prst="rect">
+            <a:avLst/>
+          </a:prstGeom>
+          <a:noFill/>
+        </p:spPr>
+        <p:txBody>
+          <a:bodyPr wrap="square" anchor="t" lIns="101600" rIns="101600" tIns="50800" bIns="50800">
+            <a:spAutoFit/>
+          </a:bodyPr>
+          <a:lstStyle/>
+          <a:p>
+            <a:pPr algn="r">
+              <a:spcBef>
+                <a:spcPts val="0"/>
+              </a:spcBef>
+              <a:spcAft>
+                <a:spcPts val="300"/>
+              </a:spcAft>
+            </a:pPr>
+            <a:r>
+              <a:rPr sz="1000" b="1">
                 <a:solidFill>
                   <a:srgbClr val="555555"/>
                 </a:solidFill>
                 <a:latin typeface="Yu Gothic"/>
               </a:rPr>
-              <a:t>・契約締結後からサポートを開始いたします。</a:t>
-            </a:r>
-          </a:p>
-          <a:p>
-            <a:pPr algn="l">
-              <a:spcBef>
-                <a:spcPts val="0"/>
-              </a:spcBef>
-              <a:spcAft>
-                <a:spcPts val="300"/>
-              </a:spcAft>
-            </a:pPr>
-            <a:r>
-              <a:rPr sz="1400" b="0">
-                <a:solidFill>
-                  <a:srgbClr val="555555"/>
-                </a:solidFill>
-                <a:latin typeface="Yu Gothic"/>
-              </a:rPr>
-              <a:t>・特別交付税措置の範囲内での実施が可能です。</a:t>
+              <a:t>2</a:t>
             </a:r>
           </a:p>
         </p:txBody>
@@ -4842,7 +4780,7 @@
                 </a:solidFill>
                 <a:latin typeface="Yu Gothic"/>
               </a:rPr>
-              <a:t>実績とサポートの強み</a:t>
+              <a:t>実績・事例紹介とサポート内容</a:t>
             </a:r>
           </a:p>
         </p:txBody>
@@ -4855,8 +4793,8 @@
         </p:nvSpPr>
         <p:spPr>
           <a:xfrm>
-            <a:off x="548640" y="1097280"/>
-            <a:ext cx="10972800" cy="411480"/>
+            <a:off x="548640" y="1005840"/>
+            <a:ext cx="5486400" cy="365760"/>
           </a:xfrm>
           <a:prstGeom prst="rect">
             <a:avLst/>
@@ -4878,13 +4816,13 @@
               </a:spcAft>
             </a:pPr>
             <a:r>
-              <a:rPr sz="1800" b="1">
+              <a:rPr sz="1600" b="1">
                 <a:solidFill>
                   <a:srgbClr val="1F3A5F"/>
                 </a:solidFill>
                 <a:latin typeface="Yu Gothic"/>
               </a:rPr>
-              <a:t>■ 実績</a:t>
+              <a:t>■ 実績・事例</a:t>
             </a:r>
           </a:p>
         </p:txBody>
@@ -4897,8 +4835,108 @@
         </p:nvSpPr>
         <p:spPr>
           <a:xfrm>
-            <a:off x="548640" y="1554480"/>
-            <a:ext cx="5394960" cy="1737360"/>
+            <a:off x="548640" y="1417320"/>
+            <a:ext cx="5486400" cy="1143000"/>
+          </a:xfrm>
+          <a:prstGeom prst="roundRect">
+            <a:avLst/>
+          </a:prstGeom>
+          <a:solidFill>
+            <a:srgbClr val="F0F4F8"/>
+          </a:solidFill>
+          <a:ln w="12700">
+            <a:solidFill>
+              <a:srgbClr val="2E8B57"/>
+            </a:solidFill>
+          </a:ln>
+          <a:effectLst/>
+        </p:spPr>
+        <p:style>
+          <a:lnRef idx="1">
+            <a:schemeClr val="accent1"/>
+          </a:lnRef>
+          <a:fillRef idx="3">
+            <a:schemeClr val="accent1"/>
+          </a:fillRef>
+          <a:effectRef idx="2">
+            <a:schemeClr val="accent1"/>
+          </a:effectRef>
+          <a:fontRef idx="minor">
+            <a:schemeClr val="lt1"/>
+          </a:fontRef>
+        </p:style>
+        <p:txBody>
+          <a:bodyPr rtlCol="0" anchor="ctr" wrap="square" lIns="101600" rIns="101600" tIns="50800" bIns="50800"/>
+          <a:lstStyle/>
+          <a:p>
+            <a:pPr algn="l">
+              <a:spcBef>
+                <a:spcPts val="0"/>
+              </a:spcBef>
+              <a:spcAft>
+                <a:spcPts val="300"/>
+              </a:spcAft>
+            </a:pPr>
+            <a:r>
+              <a:rPr sz="1300" b="1">
+                <a:solidFill>
+                  <a:srgbClr val="1F3A5F"/>
+                </a:solidFill>
+                <a:latin typeface="Yu Gothic"/>
+              </a:rPr>
+              <a:t>北海道上川町・協力隊の起業プロジェクト</a:t>
+            </a:r>
+          </a:p>
+          <a:p>
+            <a:pPr algn="l">
+              <a:spcBef>
+                <a:spcPts val="0"/>
+              </a:spcBef>
+              <a:spcAft>
+                <a:spcPts val="300"/>
+              </a:spcAft>
+            </a:pPr>
+            <a:r>
+              <a:rPr sz="1200" b="0">
+                <a:solidFill>
+                  <a:srgbClr val="555555"/>
+                </a:solidFill>
+                <a:latin typeface="Yu Gothic"/>
+              </a:rPr>
+              <a:t>ページ制作・リターン設計・プロモーションを支援。</a:t>
+            </a:r>
+          </a:p>
+          <a:p>
+            <a:pPr algn="l">
+              <a:spcBef>
+                <a:spcPts val="0"/>
+              </a:spcBef>
+              <a:spcAft>
+                <a:spcPts val="300"/>
+              </a:spcAft>
+            </a:pPr>
+            <a:r>
+              <a:rPr sz="1200" b="1">
+                <a:solidFill>
+                  <a:srgbClr val="2E8B57"/>
+                </a:solidFill>
+                <a:latin typeface="Yu Gothic"/>
+              </a:rPr>
+              <a:t>開始1週間で230万円、最終的に400万円を獲得。</a:t>
+            </a:r>
+          </a:p>
+        </p:txBody>
+      </p:sp>
+      <p:sp>
+        <p:nvSpPr>
+          <p:cNvPr id="7" name="Rounded Rectangle 6"/>
+          <p:cNvSpPr/>
+          <p:nvPr/>
+        </p:nvSpPr>
+        <p:spPr>
+          <a:xfrm>
+            <a:off x="548640" y="2651760"/>
+            <a:ext cx="5486400" cy="1051560"/>
           </a:xfrm>
           <a:prstGeom prst="roundRect">
             <a:avLst/>
@@ -4940,70 +4978,1048 @@
               </a:spcAft>
             </a:pPr>
             <a:r>
+              <a:rPr sz="1300" b="1">
+                <a:solidFill>
+                  <a:srgbClr val="1F3A5F"/>
+                </a:solidFill>
+                <a:latin typeface="Yu Gothic"/>
+              </a:rPr>
+              <a:t>全国規模の実績</a:t>
+            </a:r>
+          </a:p>
+          <a:p>
+            <a:pPr algn="l">
+              <a:spcBef>
+                <a:spcPts val="0"/>
+              </a:spcBef>
+              <a:spcAft>
+                <a:spcPts val="300"/>
+              </a:spcAft>
+            </a:pPr>
+            <a:r>
+              <a:rPr sz="1200" b="0">
+                <a:solidFill>
+                  <a:srgbClr val="555555"/>
+                </a:solidFill>
+                <a:latin typeface="Yu Gothic"/>
+              </a:rPr>
+              <a:t>協力隊CFアワード2023 日本一／ふるさとチョイス</a:t>
+            </a:r>
+          </a:p>
+          <a:p>
+            <a:pPr algn="l">
+              <a:spcBef>
+                <a:spcPts val="0"/>
+              </a:spcBef>
+              <a:spcAft>
+                <a:spcPts val="300"/>
+              </a:spcAft>
+            </a:pPr>
+            <a:r>
+              <a:rPr sz="1200" b="0">
+                <a:solidFill>
+                  <a:srgbClr val="555555"/>
+                </a:solidFill>
+                <a:latin typeface="Yu Gothic"/>
+              </a:rPr>
+              <a:t>CF運営受託で全国850PJの立ち上げを支援。</a:t>
+            </a:r>
+          </a:p>
+        </p:txBody>
+      </p:sp>
+      <p:sp>
+        <p:nvSpPr>
+          <p:cNvPr id="8" name="Rectangle 7"/>
+          <p:cNvSpPr/>
+          <p:nvPr/>
+        </p:nvSpPr>
+        <p:spPr>
+          <a:xfrm>
+            <a:off x="6217920" y="1417320"/>
+            <a:ext cx="5394960" cy="2286000"/>
+          </a:xfrm>
+          <a:prstGeom prst="rect">
+            <a:avLst/>
+          </a:prstGeom>
+          <a:solidFill>
+            <a:srgbClr val="D9E2EC"/>
+          </a:solidFill>
+          <a:ln w="15875">
+            <a:solidFill>
+              <a:srgbClr val="A9BCD0"/>
+            </a:solidFill>
+          </a:ln>
+          <a:effectLst/>
+        </p:spPr>
+        <p:style>
+          <a:lnRef idx="1">
+            <a:schemeClr val="accent1"/>
+          </a:lnRef>
+          <a:fillRef idx="3">
+            <a:schemeClr val="accent1"/>
+          </a:fillRef>
+          <a:effectRef idx="2">
+            <a:schemeClr val="accent1"/>
+          </a:effectRef>
+          <a:fontRef idx="minor">
+            <a:schemeClr val="lt1"/>
+          </a:fontRef>
+        </p:style>
+        <p:txBody>
+          <a:bodyPr rtlCol="0" anchor="ctr" wrap="square" lIns="101600" rIns="101600" tIns="50800" bIns="50800"/>
+          <a:lstStyle/>
+          <a:p>
+            <a:pPr algn="ctr">
+              <a:spcBef>
+                <a:spcPts val="0"/>
+              </a:spcBef>
+              <a:spcAft>
+                <a:spcPts val="300"/>
+              </a:spcAft>
+            </a:pPr>
+            <a:r>
+              <a:rPr sz="1300" b="1">
+                <a:solidFill>
+                  <a:srgbClr val="6B7B8C"/>
+                </a:solidFill>
+                <a:latin typeface="Yu Gothic"/>
+              </a:rPr>
+              <a:t>［写真枠］</a:t>
+            </a:r>
+          </a:p>
+          <a:p>
+            <a:pPr algn="ctr">
+              <a:spcBef>
+                <a:spcPts val="0"/>
+              </a:spcBef>
+              <a:spcAft>
+                <a:spcPts val="300"/>
+              </a:spcAft>
+            </a:pPr>
+            <a:r>
+              <a:rPr sz="1100" b="0">
+                <a:solidFill>
+                  <a:srgbClr val="6B7B8C"/>
+                </a:solidFill>
+                <a:latin typeface="Yu Gothic"/>
+              </a:rPr>
+              <a:t>上川町プロジェクト／事例の写真</a:t>
+            </a:r>
+          </a:p>
+        </p:txBody>
+      </p:sp>
+      <p:sp>
+        <p:nvSpPr>
+          <p:cNvPr id="9" name="TextBox 8"/>
+          <p:cNvSpPr txBox="1"/>
+          <p:nvPr/>
+        </p:nvSpPr>
+        <p:spPr>
+          <a:xfrm>
+            <a:off x="548640" y="3886200"/>
+            <a:ext cx="7315200" cy="365760"/>
+          </a:xfrm>
+          <a:prstGeom prst="rect">
+            <a:avLst/>
+          </a:prstGeom>
+          <a:noFill/>
+        </p:spPr>
+        <p:txBody>
+          <a:bodyPr wrap="square" anchor="t" lIns="101600" rIns="101600" tIns="50800" bIns="50800">
+            <a:spAutoFit/>
+          </a:bodyPr>
+          <a:lstStyle/>
+          <a:p>
+            <a:pPr algn="l">
+              <a:spcBef>
+                <a:spcPts val="0"/>
+              </a:spcBef>
+              <a:spcAft>
+                <a:spcPts val="300"/>
+              </a:spcAft>
+            </a:pPr>
+            <a:r>
+              <a:rPr sz="1600" b="1">
+                <a:solidFill>
+                  <a:srgbClr val="1F3A5F"/>
+                </a:solidFill>
+                <a:latin typeface="Yu Gothic"/>
+              </a:rPr>
+              <a:t>■ KITAICHIのサポート内容（企画から公開後まで伴走）</a:t>
+            </a:r>
+          </a:p>
+        </p:txBody>
+      </p:sp>
+      <p:sp>
+        <p:nvSpPr>
+          <p:cNvPr id="10" name="Rounded Rectangle 9"/>
+          <p:cNvSpPr/>
+          <p:nvPr/>
+        </p:nvSpPr>
+        <p:spPr>
+          <a:xfrm>
+            <a:off x="548640" y="4343400"/>
+            <a:ext cx="2157984" cy="1600200"/>
+          </a:xfrm>
+          <a:prstGeom prst="roundRect">
+            <a:avLst/>
+          </a:prstGeom>
+          <a:solidFill>
+            <a:srgbClr val="FFFFFF"/>
+          </a:solidFill>
+          <a:ln w="15875">
+            <a:solidFill>
+              <a:srgbClr val="2E6FB5"/>
+            </a:solidFill>
+          </a:ln>
+          <a:effectLst/>
+        </p:spPr>
+        <p:style>
+          <a:lnRef idx="1">
+            <a:schemeClr val="accent1"/>
+          </a:lnRef>
+          <a:fillRef idx="3">
+            <a:schemeClr val="accent1"/>
+          </a:fillRef>
+          <a:effectRef idx="2">
+            <a:schemeClr val="accent1"/>
+          </a:effectRef>
+          <a:fontRef idx="minor">
+            <a:schemeClr val="lt1"/>
+          </a:fontRef>
+        </p:style>
+        <p:txBody>
+          <a:bodyPr rtlCol="0" anchor="t" wrap="square" lIns="101600" rIns="101600" tIns="50800" bIns="50800"/>
+          <a:lstStyle/>
+          <a:p>
+            <a:pPr algn="l">
+              <a:spcBef>
+                <a:spcPts val="0"/>
+              </a:spcBef>
+              <a:spcAft>
+                <a:spcPts val="300"/>
+              </a:spcAft>
+            </a:pPr>
+            <a:r>
+              <a:rPr sz="1200" b="1">
+                <a:solidFill>
+                  <a:srgbClr val="2E6FB5"/>
+                </a:solidFill>
+                <a:latin typeface="Yu Gothic"/>
+              </a:rPr>
+              <a:t>① 企画整理</a:t>
+            </a:r>
+          </a:p>
+          <a:p>
+            <a:pPr algn="l">
+              <a:spcBef>
+                <a:spcPts val="0"/>
+              </a:spcBef>
+              <a:spcAft>
+                <a:spcPts val="300"/>
+              </a:spcAft>
+            </a:pPr>
+            <a:r>
+              <a:rPr sz="500" b="0">
+                <a:solidFill>
+                  <a:srgbClr val="555555"/>
+                </a:solidFill>
+                <a:latin typeface="Yu Gothic"/>
+              </a:rPr>
+              <a:t/>
+            </a:r>
+          </a:p>
+          <a:p>
+            <a:pPr algn="l">
+              <a:spcBef>
+                <a:spcPts val="0"/>
+              </a:spcBef>
+              <a:spcAft>
+                <a:spcPts val="300"/>
+              </a:spcAft>
+            </a:pPr>
+            <a:r>
+              <a:rPr sz="1050" b="0">
+                <a:solidFill>
+                  <a:srgbClr val="555555"/>
+                </a:solidFill>
+                <a:latin typeface="Yu Gothic"/>
+              </a:rPr>
+              <a:t>やりたいこと・地域での意味・魅力を整理</a:t>
+            </a:r>
+          </a:p>
+        </p:txBody>
+      </p:sp>
+      <p:sp>
+        <p:nvSpPr>
+          <p:cNvPr id="11" name="Rounded Rectangle 10"/>
+          <p:cNvSpPr/>
+          <p:nvPr/>
+        </p:nvSpPr>
+        <p:spPr>
+          <a:xfrm>
+            <a:off x="2770632" y="4343400"/>
+            <a:ext cx="2157984" cy="1600200"/>
+          </a:xfrm>
+          <a:prstGeom prst="roundRect">
+            <a:avLst/>
+          </a:prstGeom>
+          <a:solidFill>
+            <a:srgbClr val="FFFFFF"/>
+          </a:solidFill>
+          <a:ln w="15875">
+            <a:solidFill>
+              <a:srgbClr val="2E6FB5"/>
+            </a:solidFill>
+          </a:ln>
+          <a:effectLst/>
+        </p:spPr>
+        <p:style>
+          <a:lnRef idx="1">
+            <a:schemeClr val="accent1"/>
+          </a:lnRef>
+          <a:fillRef idx="3">
+            <a:schemeClr val="accent1"/>
+          </a:fillRef>
+          <a:effectRef idx="2">
+            <a:schemeClr val="accent1"/>
+          </a:effectRef>
+          <a:fontRef idx="minor">
+            <a:schemeClr val="lt1"/>
+          </a:fontRef>
+        </p:style>
+        <p:txBody>
+          <a:bodyPr rtlCol="0" anchor="t" wrap="square" lIns="101600" rIns="101600" tIns="50800" bIns="50800"/>
+          <a:lstStyle/>
+          <a:p>
+            <a:pPr algn="l">
+              <a:spcBef>
+                <a:spcPts val="0"/>
+              </a:spcBef>
+              <a:spcAft>
+                <a:spcPts val="300"/>
+              </a:spcAft>
+            </a:pPr>
+            <a:r>
+              <a:rPr sz="1200" b="1">
+                <a:solidFill>
+                  <a:srgbClr val="2E6FB5"/>
+                </a:solidFill>
+                <a:latin typeface="Yu Gothic"/>
+              </a:rPr>
+              <a:t>② 目標金額・リターン設計</a:t>
+            </a:r>
+          </a:p>
+          <a:p>
+            <a:pPr algn="l">
+              <a:spcBef>
+                <a:spcPts val="0"/>
+              </a:spcBef>
+              <a:spcAft>
+                <a:spcPts val="300"/>
+              </a:spcAft>
+            </a:pPr>
+            <a:r>
+              <a:rPr sz="500" b="0">
+                <a:solidFill>
+                  <a:srgbClr val="555555"/>
+                </a:solidFill>
+                <a:latin typeface="Yu Gothic"/>
+              </a:rPr>
+              <a:t/>
+            </a:r>
+          </a:p>
+          <a:p>
+            <a:pPr algn="l">
+              <a:spcBef>
+                <a:spcPts val="0"/>
+              </a:spcBef>
+              <a:spcAft>
+                <a:spcPts val="300"/>
+              </a:spcAft>
+            </a:pPr>
+            <a:r>
+              <a:rPr sz="1050" b="0">
+                <a:solidFill>
+                  <a:srgbClr val="555555"/>
+                </a:solidFill>
+                <a:latin typeface="Yu Gothic"/>
+              </a:rPr>
+              <a:t>金額の考え方とリターン・導線を設計</a:t>
+            </a:r>
+          </a:p>
+        </p:txBody>
+      </p:sp>
+      <p:sp>
+        <p:nvSpPr>
+          <p:cNvPr id="12" name="Rounded Rectangle 11"/>
+          <p:cNvSpPr/>
+          <p:nvPr/>
+        </p:nvSpPr>
+        <p:spPr>
+          <a:xfrm>
+            <a:off x="4992624" y="4343400"/>
+            <a:ext cx="2157984" cy="1600200"/>
+          </a:xfrm>
+          <a:prstGeom prst="roundRect">
+            <a:avLst/>
+          </a:prstGeom>
+          <a:solidFill>
+            <a:srgbClr val="FFFFFF"/>
+          </a:solidFill>
+          <a:ln w="15875">
+            <a:solidFill>
+              <a:srgbClr val="2E6FB5"/>
+            </a:solidFill>
+          </a:ln>
+          <a:effectLst/>
+        </p:spPr>
+        <p:style>
+          <a:lnRef idx="1">
+            <a:schemeClr val="accent1"/>
+          </a:lnRef>
+          <a:fillRef idx="3">
+            <a:schemeClr val="accent1"/>
+          </a:fillRef>
+          <a:effectRef idx="2">
+            <a:schemeClr val="accent1"/>
+          </a:effectRef>
+          <a:fontRef idx="minor">
+            <a:schemeClr val="lt1"/>
+          </a:fontRef>
+        </p:style>
+        <p:txBody>
+          <a:bodyPr rtlCol="0" anchor="t" wrap="square" lIns="101600" rIns="101600" tIns="50800" bIns="50800"/>
+          <a:lstStyle/>
+          <a:p>
+            <a:pPr algn="l">
+              <a:spcBef>
+                <a:spcPts val="0"/>
+              </a:spcBef>
+              <a:spcAft>
+                <a:spcPts val="300"/>
+              </a:spcAft>
+            </a:pPr>
+            <a:r>
+              <a:rPr sz="1200" b="1">
+                <a:solidFill>
+                  <a:srgbClr val="2E6FB5"/>
+                </a:solidFill>
+                <a:latin typeface="Yu Gothic"/>
+              </a:rPr>
+              <a:t>③ ページ構成・文章作成</a:t>
+            </a:r>
+          </a:p>
+          <a:p>
+            <a:pPr algn="l">
+              <a:spcBef>
+                <a:spcPts val="0"/>
+              </a:spcBef>
+              <a:spcAft>
+                <a:spcPts val="300"/>
+              </a:spcAft>
+            </a:pPr>
+            <a:r>
+              <a:rPr sz="500" b="0">
+                <a:solidFill>
+                  <a:srgbClr val="555555"/>
+                </a:solidFill>
+                <a:latin typeface="Yu Gothic"/>
+              </a:rPr>
+              <a:t/>
+            </a:r>
+          </a:p>
+          <a:p>
+            <a:pPr algn="l">
+              <a:spcBef>
+                <a:spcPts val="0"/>
+              </a:spcBef>
+              <a:spcAft>
+                <a:spcPts val="300"/>
+              </a:spcAft>
+            </a:pPr>
+            <a:r>
+              <a:rPr sz="1050" b="0">
+                <a:solidFill>
+                  <a:srgbClr val="555555"/>
+                </a:solidFill>
+                <a:latin typeface="Yu Gothic"/>
+              </a:rPr>
+              <a:t>タイトル・本文・写真で想いが伝わる形に</a:t>
+            </a:r>
+          </a:p>
+        </p:txBody>
+      </p:sp>
+      <p:sp>
+        <p:nvSpPr>
+          <p:cNvPr id="13" name="Rounded Rectangle 12"/>
+          <p:cNvSpPr/>
+          <p:nvPr/>
+        </p:nvSpPr>
+        <p:spPr>
+          <a:xfrm>
+            <a:off x="7214616" y="4343400"/>
+            <a:ext cx="2157984" cy="1600200"/>
+          </a:xfrm>
+          <a:prstGeom prst="roundRect">
+            <a:avLst/>
+          </a:prstGeom>
+          <a:solidFill>
+            <a:srgbClr val="FFFFFF"/>
+          </a:solidFill>
+          <a:ln w="15875">
+            <a:solidFill>
+              <a:srgbClr val="2E6FB5"/>
+            </a:solidFill>
+          </a:ln>
+          <a:effectLst/>
+        </p:spPr>
+        <p:style>
+          <a:lnRef idx="1">
+            <a:schemeClr val="accent1"/>
+          </a:lnRef>
+          <a:fillRef idx="3">
+            <a:schemeClr val="accent1"/>
+          </a:fillRef>
+          <a:effectRef idx="2">
+            <a:schemeClr val="accent1"/>
+          </a:effectRef>
+          <a:fontRef idx="minor">
+            <a:schemeClr val="lt1"/>
+          </a:fontRef>
+        </p:style>
+        <p:txBody>
+          <a:bodyPr rtlCol="0" anchor="t" wrap="square" lIns="101600" rIns="101600" tIns="50800" bIns="50800"/>
+          <a:lstStyle/>
+          <a:p>
+            <a:pPr algn="l">
+              <a:spcBef>
+                <a:spcPts val="0"/>
+              </a:spcBef>
+              <a:spcAft>
+                <a:spcPts val="300"/>
+              </a:spcAft>
+            </a:pPr>
+            <a:r>
+              <a:rPr sz="1200" b="1">
+                <a:solidFill>
+                  <a:srgbClr val="2E6FB5"/>
+                </a:solidFill>
+                <a:latin typeface="Yu Gothic"/>
+              </a:rPr>
+              <a:t>④ 広報・発信計画</a:t>
+            </a:r>
+          </a:p>
+          <a:p>
+            <a:pPr algn="l">
+              <a:spcBef>
+                <a:spcPts val="0"/>
+              </a:spcBef>
+              <a:spcAft>
+                <a:spcPts val="300"/>
+              </a:spcAft>
+            </a:pPr>
+            <a:r>
+              <a:rPr sz="500" b="0">
+                <a:solidFill>
+                  <a:srgbClr val="555555"/>
+                </a:solidFill>
+                <a:latin typeface="Yu Gothic"/>
+              </a:rPr>
+              <a:t/>
+            </a:r>
+          </a:p>
+          <a:p>
+            <a:pPr algn="l">
+              <a:spcBef>
+                <a:spcPts val="0"/>
+              </a:spcBef>
+              <a:spcAft>
+                <a:spcPts val="300"/>
+              </a:spcAft>
+            </a:pPr>
+            <a:r>
+              <a:rPr sz="1050" b="0">
+                <a:solidFill>
+                  <a:srgbClr val="555555"/>
+                </a:solidFill>
+                <a:latin typeface="Yu Gothic"/>
+              </a:rPr>
+              <a:t>時期ごとの発信とSNS・周知の進め方</a:t>
+            </a:r>
+          </a:p>
+        </p:txBody>
+      </p:sp>
+      <p:sp>
+        <p:nvSpPr>
+          <p:cNvPr id="14" name="Rounded Rectangle 13"/>
+          <p:cNvSpPr/>
+          <p:nvPr/>
+        </p:nvSpPr>
+        <p:spPr>
+          <a:xfrm>
+            <a:off x="9436608" y="4343400"/>
+            <a:ext cx="2157984" cy="1600200"/>
+          </a:xfrm>
+          <a:prstGeom prst="roundRect">
+            <a:avLst/>
+          </a:prstGeom>
+          <a:solidFill>
+            <a:srgbClr val="FFFFFF"/>
+          </a:solidFill>
+          <a:ln w="15875">
+            <a:solidFill>
+              <a:srgbClr val="2E6FB5"/>
+            </a:solidFill>
+          </a:ln>
+          <a:effectLst/>
+        </p:spPr>
+        <p:style>
+          <a:lnRef idx="1">
+            <a:schemeClr val="accent1"/>
+          </a:lnRef>
+          <a:fillRef idx="3">
+            <a:schemeClr val="accent1"/>
+          </a:fillRef>
+          <a:effectRef idx="2">
+            <a:schemeClr val="accent1"/>
+          </a:effectRef>
+          <a:fontRef idx="minor">
+            <a:schemeClr val="lt1"/>
+          </a:fontRef>
+        </p:style>
+        <p:txBody>
+          <a:bodyPr rtlCol="0" anchor="t" wrap="square" lIns="101600" rIns="101600" tIns="50800" bIns="50800"/>
+          <a:lstStyle/>
+          <a:p>
+            <a:pPr algn="l">
+              <a:spcBef>
+                <a:spcPts val="0"/>
+              </a:spcBef>
+              <a:spcAft>
+                <a:spcPts val="300"/>
+              </a:spcAft>
+            </a:pPr>
+            <a:r>
+              <a:rPr sz="1200" b="1">
+                <a:solidFill>
+                  <a:srgbClr val="2E6FB5"/>
+                </a:solidFill>
+                <a:latin typeface="Yu Gothic"/>
+              </a:rPr>
+              <a:t>⑤ 公開後の伴走</a:t>
+            </a:r>
+          </a:p>
+          <a:p>
+            <a:pPr algn="l">
+              <a:spcBef>
+                <a:spcPts val="0"/>
+              </a:spcBef>
+              <a:spcAft>
+                <a:spcPts val="300"/>
+              </a:spcAft>
+            </a:pPr>
+            <a:r>
+              <a:rPr sz="500" b="0">
+                <a:solidFill>
+                  <a:srgbClr val="555555"/>
+                </a:solidFill>
+                <a:latin typeface="Yu Gothic"/>
+              </a:rPr>
+              <a:t/>
+            </a:r>
+          </a:p>
+          <a:p>
+            <a:pPr algn="l">
+              <a:spcBef>
+                <a:spcPts val="0"/>
+              </a:spcBef>
+              <a:spcAft>
+                <a:spcPts val="300"/>
+              </a:spcAft>
+            </a:pPr>
+            <a:r>
+              <a:rPr sz="1050" b="0">
+                <a:solidFill>
+                  <a:srgbClr val="555555"/>
+                </a:solidFill>
+                <a:latin typeface="Yu Gothic"/>
+              </a:rPr>
+              <a:t>状況を見て追加施策・ネクストゴール対応</a:t>
+            </a:r>
+          </a:p>
+        </p:txBody>
+      </p:sp>
+      <p:sp>
+        <p:nvSpPr>
+          <p:cNvPr id="15" name="TextBox 14"/>
+          <p:cNvSpPr txBox="1"/>
+          <p:nvPr/>
+        </p:nvSpPr>
+        <p:spPr>
+          <a:xfrm>
+            <a:off x="548640" y="6446520"/>
+            <a:ext cx="7315200" cy="320040"/>
+          </a:xfrm>
+          <a:prstGeom prst="rect">
+            <a:avLst/>
+          </a:prstGeom>
+          <a:noFill/>
+        </p:spPr>
+        <p:txBody>
+          <a:bodyPr wrap="square" anchor="t" lIns="101600" rIns="101600" tIns="50800" bIns="50800">
+            <a:spAutoFit/>
+          </a:bodyPr>
+          <a:lstStyle/>
+          <a:p>
+            <a:pPr algn="l">
+              <a:spcBef>
+                <a:spcPts val="0"/>
+              </a:spcBef>
+              <a:spcAft>
+                <a:spcPts val="300"/>
+              </a:spcAft>
+            </a:pPr>
+            <a:r>
+              <a:rPr sz="900" b="0">
+                <a:solidFill>
+                  <a:srgbClr val="555555"/>
+                </a:solidFill>
+                <a:latin typeface="Yu Gothic"/>
+              </a:rPr>
+              <a:t>株式会社KITAICHI　地域おこし協力隊向け クラウドファンディング活用のご提案</a:t>
+            </a:r>
+          </a:p>
+        </p:txBody>
+      </p:sp>
+      <p:sp>
+        <p:nvSpPr>
+          <p:cNvPr id="16" name="TextBox 15"/>
+          <p:cNvSpPr txBox="1"/>
+          <p:nvPr/>
+        </p:nvSpPr>
+        <p:spPr>
+          <a:xfrm>
+            <a:off x="10972800" y="6446520"/>
+            <a:ext cx="822960" cy="320040"/>
+          </a:xfrm>
+          <a:prstGeom prst="rect">
+            <a:avLst/>
+          </a:prstGeom>
+          <a:noFill/>
+        </p:spPr>
+        <p:txBody>
+          <a:bodyPr wrap="square" anchor="t" lIns="101600" rIns="101600" tIns="50800" bIns="50800">
+            <a:spAutoFit/>
+          </a:bodyPr>
+          <a:lstStyle/>
+          <a:p>
+            <a:pPr algn="r">
+              <a:spcBef>
+                <a:spcPts val="0"/>
+              </a:spcBef>
+              <a:spcAft>
+                <a:spcPts val="300"/>
+              </a:spcAft>
+            </a:pPr>
+            <a:r>
+              <a:rPr sz="1000" b="1">
+                <a:solidFill>
+                  <a:srgbClr val="555555"/>
+                </a:solidFill>
+                <a:latin typeface="Yu Gothic"/>
+              </a:rPr>
+              <a:t>3</a:t>
+            </a:r>
+          </a:p>
+        </p:txBody>
+      </p:sp>
+    </p:spTree>
+  </p:cSld>
+  <p:clrMapOvr>
+    <a:masterClrMapping/>
+  </p:clrMapOvr>
+</p:sld>
+</file>
+
+<file path=ppt/slides/slide4.xml><?xml version="1.0" encoding="utf-8"?>
+<p:sld xmlns:a="http://schemas.openxmlformats.org/drawingml/2006/main" xmlns:p="http://schemas.openxmlformats.org/presentationml/2006/main" xmlns:r="http://schemas.openxmlformats.org/officeDocument/2006/relationships">
+  <p:cSld>
+    <p:spTree>
+      <p:nvGrpSpPr>
+        <p:cNvPr id="1" name=""/>
+        <p:cNvGrpSpPr/>
+        <p:nvPr/>
+      </p:nvGrpSpPr>
+      <p:grpSpPr/>
+      <p:sp>
+        <p:nvSpPr>
+          <p:cNvPr id="2" name="Rectangle 1"/>
+          <p:cNvSpPr/>
+          <p:nvPr/>
+        </p:nvSpPr>
+        <p:spPr>
+          <a:xfrm>
+            <a:off x="0" y="0"/>
+            <a:ext cx="12191695" cy="6858000"/>
+          </a:xfrm>
+          <a:prstGeom prst="rect">
+            <a:avLst/>
+          </a:prstGeom>
+          <a:solidFill>
+            <a:srgbClr val="FFFFFF"/>
+          </a:solidFill>
+          <a:ln>
+            <a:noFill/>
+          </a:ln>
+          <a:effectLst/>
+        </p:spPr>
+        <p:style>
+          <a:lnRef idx="1">
+            <a:schemeClr val="accent1"/>
+          </a:lnRef>
+          <a:fillRef idx="3">
+            <a:schemeClr val="accent1"/>
+          </a:fillRef>
+          <a:effectRef idx="2">
+            <a:schemeClr val="accent1"/>
+          </a:effectRef>
+          <a:fontRef idx="minor">
+            <a:schemeClr val="lt1"/>
+          </a:fontRef>
+        </p:style>
+        <p:txBody>
+          <a:bodyPr rtlCol="0" anchor="ctr"/>
+          <a:lstStyle/>
+          <a:p>
+            <a:pPr algn="ctr"/>
+          </a:p>
+        </p:txBody>
+      </p:sp>
+      <p:sp>
+        <p:nvSpPr>
+          <p:cNvPr id="3" name="Rectangle 2"/>
+          <p:cNvSpPr/>
+          <p:nvPr/>
+        </p:nvSpPr>
+        <p:spPr>
+          <a:xfrm>
+            <a:off x="0" y="0"/>
+            <a:ext cx="12191695" cy="914400"/>
+          </a:xfrm>
+          <a:prstGeom prst="rect">
+            <a:avLst/>
+          </a:prstGeom>
+          <a:solidFill>
+            <a:srgbClr val="1F3A5F"/>
+          </a:solidFill>
+          <a:ln>
+            <a:noFill/>
+          </a:ln>
+          <a:effectLst/>
+        </p:spPr>
+        <p:style>
+          <a:lnRef idx="1">
+            <a:schemeClr val="accent1"/>
+          </a:lnRef>
+          <a:fillRef idx="3">
+            <a:schemeClr val="accent1"/>
+          </a:fillRef>
+          <a:effectRef idx="2">
+            <a:schemeClr val="accent1"/>
+          </a:effectRef>
+          <a:fontRef idx="minor">
+            <a:schemeClr val="lt1"/>
+          </a:fontRef>
+        </p:style>
+        <p:txBody>
+          <a:bodyPr rtlCol="0" anchor="ctr"/>
+          <a:lstStyle/>
+          <a:p>
+            <a:pPr algn="ctr"/>
+          </a:p>
+        </p:txBody>
+      </p:sp>
+      <p:sp>
+        <p:nvSpPr>
+          <p:cNvPr id="4" name="TextBox 3"/>
+          <p:cNvSpPr txBox="1"/>
+          <p:nvPr/>
+        </p:nvSpPr>
+        <p:spPr>
+          <a:xfrm>
+            <a:off x="548640" y="201168"/>
+            <a:ext cx="10972800" cy="548640"/>
+          </a:xfrm>
+          <a:prstGeom prst="rect">
+            <a:avLst/>
+          </a:prstGeom>
+          <a:noFill/>
+        </p:spPr>
+        <p:txBody>
+          <a:bodyPr wrap="square" anchor="t" lIns="101600" rIns="101600" tIns="50800" bIns="50800">
+            <a:spAutoFit/>
+          </a:bodyPr>
+          <a:lstStyle/>
+          <a:p>
+            <a:pPr algn="l">
+              <a:spcBef>
+                <a:spcPts val="0"/>
+              </a:spcBef>
+              <a:spcAft>
+                <a:spcPts val="300"/>
+              </a:spcAft>
+            </a:pPr>
+            <a:r>
+              <a:rPr sz="2200" b="1">
+                <a:solidFill>
+                  <a:srgbClr val="FFFFFF"/>
+                </a:solidFill>
+                <a:latin typeface="Yu Gothic"/>
+              </a:rPr>
+              <a:t>サポートの強みとご案内</a:t>
+            </a:r>
+          </a:p>
+        </p:txBody>
+      </p:sp>
+      <p:sp>
+        <p:nvSpPr>
+          <p:cNvPr id="5" name="TextBox 4"/>
+          <p:cNvSpPr txBox="1"/>
+          <p:nvPr/>
+        </p:nvSpPr>
+        <p:spPr>
+          <a:xfrm>
+            <a:off x="548640" y="1005840"/>
+            <a:ext cx="10972800" cy="365760"/>
+          </a:xfrm>
+          <a:prstGeom prst="rect">
+            <a:avLst/>
+          </a:prstGeom>
+          <a:noFill/>
+        </p:spPr>
+        <p:txBody>
+          <a:bodyPr wrap="square" anchor="t" lIns="101600" rIns="101600" tIns="50800" bIns="50800">
+            <a:spAutoFit/>
+          </a:bodyPr>
+          <a:lstStyle/>
+          <a:p>
+            <a:pPr algn="l">
+              <a:spcBef>
+                <a:spcPts val="0"/>
+              </a:spcBef>
+              <a:spcAft>
+                <a:spcPts val="300"/>
+              </a:spcAft>
+            </a:pPr>
+            <a:r>
+              <a:rPr sz="1600" b="1">
+                <a:solidFill>
+                  <a:srgbClr val="1F3A5F"/>
+                </a:solidFill>
+                <a:latin typeface="Yu Gothic"/>
+              </a:rPr>
+              <a:t>■ サポートの3つの強み</a:t>
+            </a:r>
+          </a:p>
+        </p:txBody>
+      </p:sp>
+      <p:sp>
+        <p:nvSpPr>
+          <p:cNvPr id="6" name="Rounded Rectangle 5"/>
+          <p:cNvSpPr/>
+          <p:nvPr/>
+        </p:nvSpPr>
+        <p:spPr>
+          <a:xfrm>
+            <a:off x="548640" y="1417320"/>
+            <a:ext cx="3611880" cy="1280160"/>
+          </a:xfrm>
+          <a:prstGeom prst="roundRect">
+            <a:avLst/>
+          </a:prstGeom>
+          <a:solidFill>
+            <a:srgbClr val="FFFFFF"/>
+          </a:solidFill>
+          <a:ln w="15875">
+            <a:solidFill>
+              <a:srgbClr val="2E6FB5"/>
+            </a:solidFill>
+          </a:ln>
+          <a:effectLst/>
+        </p:spPr>
+        <p:style>
+          <a:lnRef idx="1">
+            <a:schemeClr val="accent1"/>
+          </a:lnRef>
+          <a:fillRef idx="3">
+            <a:schemeClr val="accent1"/>
+          </a:fillRef>
+          <a:effectRef idx="2">
+            <a:schemeClr val="accent1"/>
+          </a:effectRef>
+          <a:fontRef idx="minor">
+            <a:schemeClr val="lt1"/>
+          </a:fontRef>
+        </p:style>
+        <p:txBody>
+          <a:bodyPr rtlCol="0" anchor="t" wrap="square" lIns="101600" rIns="101600" tIns="50800" bIns="50800"/>
+          <a:lstStyle/>
+          <a:p>
+            <a:pPr algn="l">
+              <a:spcBef>
+                <a:spcPts val="0"/>
+              </a:spcBef>
+              <a:spcAft>
+                <a:spcPts val="300"/>
+              </a:spcAft>
+            </a:pPr>
+            <a:r>
               <a:rPr sz="1400" b="1">
                 <a:solidFill>
-                  <a:srgbClr val="1F3A5F"/>
-                </a:solidFill>
-                <a:latin typeface="Yu Gothic"/>
-              </a:rPr>
-              <a:t>地域おこし協力隊CFアワード2023 日本一</a:t>
-            </a:r>
-          </a:p>
-          <a:p>
-            <a:pPr algn="l">
-              <a:spcBef>
-                <a:spcPts val="0"/>
-              </a:spcBef>
-              <a:spcAft>
-                <a:spcPts val="300"/>
-              </a:spcAft>
-            </a:pPr>
-            <a:r>
-              <a:rPr sz="1300" b="0">
+                  <a:srgbClr val="2E6FB5"/>
+                </a:solidFill>
+                <a:latin typeface="Yu Gothic"/>
+              </a:rPr>
+              <a:t>① 全体の見える化</a:t>
+            </a:r>
+          </a:p>
+          <a:p>
+            <a:pPr algn="l">
+              <a:spcBef>
+                <a:spcPts val="0"/>
+              </a:spcBef>
+              <a:spcAft>
+                <a:spcPts val="300"/>
+              </a:spcAft>
+            </a:pPr>
+            <a:r>
+              <a:rPr sz="500" b="0">
                 <a:solidFill>
                   <a:srgbClr val="555555"/>
                 </a:solidFill>
                 <a:latin typeface="Yu Gothic"/>
               </a:rPr>
-              <a:t>CAMPFIREとパートナー連携し起業支援を実施。</a:t>
-            </a:r>
-          </a:p>
-          <a:p>
-            <a:pPr algn="l">
-              <a:spcBef>
-                <a:spcPts val="0"/>
-              </a:spcBef>
-              <a:spcAft>
-                <a:spcPts val="300"/>
-              </a:spcAft>
-            </a:pPr>
-            <a:r>
-              <a:rPr sz="1300" b="0">
+              <a:t/>
+            </a:r>
+          </a:p>
+          <a:p>
+            <a:pPr algn="l">
+              <a:spcBef>
+                <a:spcPts val="0"/>
+              </a:spcBef>
+              <a:spcAft>
+                <a:spcPts val="300"/>
+              </a:spcAft>
+            </a:pPr>
+            <a:r>
+              <a:rPr sz="1200" b="0">
                 <a:solidFill>
                   <a:srgbClr val="555555"/>
                 </a:solidFill>
                 <a:latin typeface="Yu Gothic"/>
               </a:rPr>
-              <a:t>ふるさとチョイスCF（令和7年度）運営受託、</a:t>
-            </a:r>
-          </a:p>
-          <a:p>
-            <a:pPr algn="l">
-              <a:spcBef>
-                <a:spcPts val="0"/>
-              </a:spcBef>
-              <a:spcAft>
-                <a:spcPts val="300"/>
-              </a:spcAft>
-            </a:pPr>
-            <a:r>
-              <a:rPr sz="1300" b="0">
-                <a:solidFill>
-                  <a:srgbClr val="555555"/>
-                </a:solidFill>
-                <a:latin typeface="Yu Gothic"/>
-              </a:rPr>
-              <a:t>全国850プロジェクトの立ち上げをサポート。</a:t>
+              <a:t>「いつ・何を」やるか全体を設計し、的確に管理。</a:t>
             </a:r>
           </a:p>
         </p:txBody>
@@ -5016,8 +6032,250 @@
         </p:nvSpPr>
         <p:spPr>
           <a:xfrm>
-            <a:off x="6217920" y="1554480"/>
-            <a:ext cx="5394960" cy="1737360"/>
+            <a:off x="4343400" y="1417320"/>
+            <a:ext cx="3611880" cy="1280160"/>
+          </a:xfrm>
+          <a:prstGeom prst="roundRect">
+            <a:avLst/>
+          </a:prstGeom>
+          <a:solidFill>
+            <a:srgbClr val="FFFFFF"/>
+          </a:solidFill>
+          <a:ln w="15875">
+            <a:solidFill>
+              <a:srgbClr val="2E6FB5"/>
+            </a:solidFill>
+          </a:ln>
+          <a:effectLst/>
+        </p:spPr>
+        <p:style>
+          <a:lnRef idx="1">
+            <a:schemeClr val="accent1"/>
+          </a:lnRef>
+          <a:fillRef idx="3">
+            <a:schemeClr val="accent1"/>
+          </a:fillRef>
+          <a:effectRef idx="2">
+            <a:schemeClr val="accent1"/>
+          </a:effectRef>
+          <a:fontRef idx="minor">
+            <a:schemeClr val="lt1"/>
+          </a:fontRef>
+        </p:style>
+        <p:txBody>
+          <a:bodyPr rtlCol="0" anchor="t" wrap="square" lIns="101600" rIns="101600" tIns="50800" bIns="50800"/>
+          <a:lstStyle/>
+          <a:p>
+            <a:pPr algn="l">
+              <a:spcBef>
+                <a:spcPts val="0"/>
+              </a:spcBef>
+              <a:spcAft>
+                <a:spcPts val="300"/>
+              </a:spcAft>
+            </a:pPr>
+            <a:r>
+              <a:rPr sz="1400" b="1">
+                <a:solidFill>
+                  <a:srgbClr val="2E6FB5"/>
+                </a:solidFill>
+                <a:latin typeface="Yu Gothic"/>
+              </a:rPr>
+              <a:t>② CFのプロが戦略立案</a:t>
+            </a:r>
+          </a:p>
+          <a:p>
+            <a:pPr algn="l">
+              <a:spcBef>
+                <a:spcPts val="0"/>
+              </a:spcBef>
+              <a:spcAft>
+                <a:spcPts val="300"/>
+              </a:spcAft>
+            </a:pPr>
+            <a:r>
+              <a:rPr sz="500" b="0">
+                <a:solidFill>
+                  <a:srgbClr val="555555"/>
+                </a:solidFill>
+                <a:latin typeface="Yu Gothic"/>
+              </a:rPr>
+              <a:t/>
+            </a:r>
+          </a:p>
+          <a:p>
+            <a:pPr algn="l">
+              <a:spcBef>
+                <a:spcPts val="0"/>
+              </a:spcBef>
+              <a:spcAft>
+                <a:spcPts val="300"/>
+              </a:spcAft>
+            </a:pPr>
+            <a:r>
+              <a:rPr sz="1200" b="0">
+                <a:solidFill>
+                  <a:srgbClr val="555555"/>
+                </a:solidFill>
+                <a:latin typeface="Yu Gothic"/>
+              </a:rPr>
+              <a:t>元自治体職員・元サイト運営者・ファンドレイザーが立案。</a:t>
+            </a:r>
+          </a:p>
+        </p:txBody>
+      </p:sp>
+      <p:sp>
+        <p:nvSpPr>
+          <p:cNvPr id="8" name="Rounded Rectangle 7"/>
+          <p:cNvSpPr/>
+          <p:nvPr/>
+        </p:nvSpPr>
+        <p:spPr>
+          <a:xfrm>
+            <a:off x="8138160" y="1417320"/>
+            <a:ext cx="3611880" cy="1280160"/>
+          </a:xfrm>
+          <a:prstGeom prst="roundRect">
+            <a:avLst/>
+          </a:prstGeom>
+          <a:solidFill>
+            <a:srgbClr val="FFFFFF"/>
+          </a:solidFill>
+          <a:ln w="15875">
+            <a:solidFill>
+              <a:srgbClr val="2E6FB5"/>
+            </a:solidFill>
+          </a:ln>
+          <a:effectLst/>
+        </p:spPr>
+        <p:style>
+          <a:lnRef idx="1">
+            <a:schemeClr val="accent1"/>
+          </a:lnRef>
+          <a:fillRef idx="3">
+            <a:schemeClr val="accent1"/>
+          </a:fillRef>
+          <a:effectRef idx="2">
+            <a:schemeClr val="accent1"/>
+          </a:effectRef>
+          <a:fontRef idx="minor">
+            <a:schemeClr val="lt1"/>
+          </a:fontRef>
+        </p:style>
+        <p:txBody>
+          <a:bodyPr rtlCol="0" anchor="t" wrap="square" lIns="101600" rIns="101600" tIns="50800" bIns="50800"/>
+          <a:lstStyle/>
+          <a:p>
+            <a:pPr algn="l">
+              <a:spcBef>
+                <a:spcPts val="0"/>
+              </a:spcBef>
+              <a:spcAft>
+                <a:spcPts val="300"/>
+              </a:spcAft>
+            </a:pPr>
+            <a:r>
+              <a:rPr sz="1400" b="1">
+                <a:solidFill>
+                  <a:srgbClr val="2E6FB5"/>
+                </a:solidFill>
+                <a:latin typeface="Yu Gothic"/>
+              </a:rPr>
+              <a:t>③ 最後まで寄り添う伴走力</a:t>
+            </a:r>
+          </a:p>
+          <a:p>
+            <a:pPr algn="l">
+              <a:spcBef>
+                <a:spcPts val="0"/>
+              </a:spcBef>
+              <a:spcAft>
+                <a:spcPts val="300"/>
+              </a:spcAft>
+            </a:pPr>
+            <a:r>
+              <a:rPr sz="500" b="0">
+                <a:solidFill>
+                  <a:srgbClr val="555555"/>
+                </a:solidFill>
+                <a:latin typeface="Yu Gothic"/>
+              </a:rPr>
+              <a:t/>
+            </a:r>
+          </a:p>
+          <a:p>
+            <a:pPr algn="l">
+              <a:spcBef>
+                <a:spcPts val="0"/>
+              </a:spcBef>
+              <a:spcAft>
+                <a:spcPts val="300"/>
+              </a:spcAft>
+            </a:pPr>
+            <a:r>
+              <a:rPr sz="1200" b="0">
+                <a:solidFill>
+                  <a:srgbClr val="555555"/>
+                </a:solidFill>
+                <a:latin typeface="Yu Gothic"/>
+              </a:rPr>
+              <a:t>密な連絡と進行管理で挑戦者を一人にしません。</a:t>
+            </a:r>
+          </a:p>
+        </p:txBody>
+      </p:sp>
+      <p:sp>
+        <p:nvSpPr>
+          <p:cNvPr id="9" name="TextBox 8"/>
+          <p:cNvSpPr txBox="1"/>
+          <p:nvPr/>
+        </p:nvSpPr>
+        <p:spPr>
+          <a:xfrm>
+            <a:off x="548640" y="2880360"/>
+            <a:ext cx="10972800" cy="365760"/>
+          </a:xfrm>
+          <a:prstGeom prst="rect">
+            <a:avLst/>
+          </a:prstGeom>
+          <a:noFill/>
+        </p:spPr>
+        <p:txBody>
+          <a:bodyPr wrap="square" anchor="t" lIns="101600" rIns="101600" tIns="50800" bIns="50800">
+            <a:spAutoFit/>
+          </a:bodyPr>
+          <a:lstStyle/>
+          <a:p>
+            <a:pPr algn="l">
+              <a:spcBef>
+                <a:spcPts val="0"/>
+              </a:spcBef>
+              <a:spcAft>
+                <a:spcPts val="300"/>
+              </a:spcAft>
+            </a:pPr>
+            <a:r>
+              <a:rPr sz="1600" b="1">
+                <a:solidFill>
+                  <a:srgbClr val="1F3A5F"/>
+                </a:solidFill>
+                <a:latin typeface="Yu Gothic"/>
+              </a:rPr>
+              <a:t>■ 協力隊向け クラウドファンディング活用セミナーのご案内</a:t>
+            </a:r>
+          </a:p>
+        </p:txBody>
+      </p:sp>
+      <p:sp>
+        <p:nvSpPr>
+          <p:cNvPr id="10" name="Rounded Rectangle 9"/>
+          <p:cNvSpPr/>
+          <p:nvPr/>
+        </p:nvSpPr>
+        <p:spPr>
+          <a:xfrm>
+            <a:off x="548640" y="3291840"/>
+            <a:ext cx="6766560" cy="2103120"/>
           </a:xfrm>
           <a:prstGeom prst="roundRect">
             <a:avLst/>
@@ -5047,44 +6305,120 @@
           </a:fontRef>
         </p:style>
         <p:txBody>
-          <a:bodyPr rtlCol="0" anchor="ctr" wrap="square" lIns="101600" rIns="101600" tIns="50800" bIns="50800"/>
-          <a:lstStyle/>
-          <a:p>
-            <a:pPr algn="l">
-              <a:spcBef>
-                <a:spcPts val="0"/>
-              </a:spcBef>
-              <a:spcAft>
-                <a:spcPts val="300"/>
-              </a:spcAft>
-            </a:pPr>
-            <a:r>
-              <a:rPr sz="1400" b="1">
+          <a:bodyPr rtlCol="0" anchor="t" wrap="square" lIns="101600" rIns="101600" tIns="50800" bIns="50800"/>
+          <a:lstStyle/>
+          <a:p>
+            <a:pPr algn="l">
+              <a:spcBef>
+                <a:spcPts val="0"/>
+              </a:spcBef>
+              <a:spcAft>
+                <a:spcPts val="300"/>
+              </a:spcAft>
+            </a:pPr>
+            <a:r>
+              <a:rPr sz="1300" b="0">
+                <a:solidFill>
+                  <a:srgbClr val="555555"/>
+                </a:solidFill>
+                <a:latin typeface="Yu Gothic"/>
+              </a:rPr>
+              <a:t>研修・定例会・相談会・勉強会・庁内の情報共有など</a:t>
+            </a:r>
+          </a:p>
+          <a:p>
+            <a:pPr algn="l">
+              <a:spcBef>
+                <a:spcPts val="0"/>
+              </a:spcBef>
+              <a:spcAft>
+                <a:spcPts val="300"/>
+              </a:spcAft>
+            </a:pPr>
+            <a:r>
+              <a:rPr sz="1300" b="0">
+                <a:solidFill>
+                  <a:srgbClr val="555555"/>
+                </a:solidFill>
+                <a:latin typeface="Yu Gothic"/>
+              </a:rPr>
+              <a:t>さまざまな場でセミナーをご紹介いただけます。</a:t>
+            </a:r>
+          </a:p>
+          <a:p>
+            <a:pPr algn="l">
+              <a:spcBef>
+                <a:spcPts val="0"/>
+              </a:spcBef>
+              <a:spcAft>
+                <a:spcPts val="300"/>
+              </a:spcAft>
+            </a:pPr>
+            <a:r>
+              <a:rPr sz="600" b="0">
+                <a:solidFill>
+                  <a:srgbClr val="555555"/>
+                </a:solidFill>
+                <a:latin typeface="Yu Gothic"/>
+              </a:rPr>
+              <a:t/>
+            </a:r>
+          </a:p>
+          <a:p>
+            <a:pPr algn="l">
+              <a:spcBef>
+                <a:spcPts val="0"/>
+              </a:spcBef>
+              <a:spcAft>
+                <a:spcPts val="300"/>
+              </a:spcAft>
+            </a:pPr>
+            <a:r>
+              <a:rPr sz="1300" b="1">
                 <a:solidFill>
                   <a:srgbClr val="1F3A5F"/>
                 </a:solidFill>
                 <a:latin typeface="Yu Gothic"/>
               </a:rPr>
-              <a:t>北海道上川町・協力隊の起業プロジェクト</a:t>
-            </a:r>
-          </a:p>
-          <a:p>
-            <a:pPr algn="l">
-              <a:spcBef>
-                <a:spcPts val="0"/>
-              </a:spcBef>
-              <a:spcAft>
-                <a:spcPts val="300"/>
-              </a:spcAft>
-            </a:pPr>
-            <a:r>
-              <a:rPr sz="1300" b="0">
+              <a:t>内容：CFの基本／活用事例／協力隊活動との相性／</a:t>
+            </a:r>
+          </a:p>
+          <a:p>
+            <a:pPr algn="l">
+              <a:spcBef>
+                <a:spcPts val="0"/>
+              </a:spcBef>
+              <a:spcAft>
+                <a:spcPts val="300"/>
+              </a:spcAft>
+            </a:pPr>
+            <a:r>
+              <a:rPr sz="1300" b="1">
+                <a:solidFill>
+                  <a:srgbClr val="1F3A5F"/>
+                </a:solidFill>
+                <a:latin typeface="Yu Gothic"/>
+              </a:rPr>
+              <a:t>　　　挑戦する際の注意点　など（情報提供の場）</a:t>
+            </a:r>
+          </a:p>
+          <a:p>
+            <a:pPr algn="l">
+              <a:spcBef>
+                <a:spcPts val="0"/>
+              </a:spcBef>
+              <a:spcAft>
+                <a:spcPts val="300"/>
+              </a:spcAft>
+            </a:pPr>
+            <a:r>
+              <a:rPr sz="600" b="0">
                 <a:solidFill>
                   <a:srgbClr val="555555"/>
                 </a:solidFill>
                 <a:latin typeface="Yu Gothic"/>
               </a:rPr>
-              <a:t>ページ制作・リターン設計・プロモーション戦略を支援。</a:t>
+              <a:t/>
             </a:r>
           </a:p>
           <a:p>
@@ -5099,77 +6433,35 @@
             <a:r>
               <a:rPr sz="1300" b="1">
                 <a:solidFill>
-                  <a:srgbClr val="2E8B57"/>
-                </a:solidFill>
-                <a:latin typeface="Yu Gothic"/>
-              </a:rPr>
-              <a:t>開始1週間で230万円、最終的に400万円の支援を獲得。</a:t>
-            </a:r>
-          </a:p>
-        </p:txBody>
-      </p:sp>
-      <p:sp>
-        <p:nvSpPr>
-          <p:cNvPr id="8" name="TextBox 7"/>
-          <p:cNvSpPr txBox="1"/>
+                  <a:srgbClr val="E06C1F"/>
+                </a:solidFill>
+                <a:latin typeface="Yu Gothic"/>
+              </a:rPr>
+              <a:t>特別交付税措置の範囲内での実施が可能です。</a:t>
+            </a:r>
+          </a:p>
+        </p:txBody>
+      </p:sp>
+      <p:sp>
+        <p:nvSpPr>
+          <p:cNvPr id="11" name="Rectangle 10"/>
+          <p:cNvSpPr/>
           <p:nvPr/>
         </p:nvSpPr>
         <p:spPr>
           <a:xfrm>
-            <a:off x="548640" y="3474720"/>
-            <a:ext cx="10972800" cy="411480"/>
+            <a:off x="7543800" y="3291840"/>
+            <a:ext cx="4069080" cy="2103120"/>
           </a:xfrm>
           <a:prstGeom prst="rect">
             <a:avLst/>
           </a:prstGeom>
-          <a:noFill/>
-        </p:spPr>
-        <p:txBody>
-          <a:bodyPr wrap="square" anchor="t" lIns="101600" rIns="101600" tIns="50800" bIns="50800">
-            <a:spAutoFit/>
-          </a:bodyPr>
-          <a:lstStyle/>
-          <a:p>
-            <a:pPr algn="l">
-              <a:spcBef>
-                <a:spcPts val="0"/>
-              </a:spcBef>
-              <a:spcAft>
-                <a:spcPts val="300"/>
-              </a:spcAft>
-            </a:pPr>
-            <a:r>
-              <a:rPr sz="1800" b="1">
-                <a:solidFill>
-                  <a:srgbClr val="1F3A5F"/>
-                </a:solidFill>
-                <a:latin typeface="Yu Gothic"/>
-              </a:rPr>
-              <a:t>■ サポートの3つの強み</a:t>
-            </a:r>
-          </a:p>
-        </p:txBody>
-      </p:sp>
-      <p:sp>
-        <p:nvSpPr>
-          <p:cNvPr id="9" name="Rounded Rectangle 8"/>
-          <p:cNvSpPr/>
-          <p:nvPr/>
-        </p:nvSpPr>
-        <p:spPr>
-          <a:xfrm>
-            <a:off x="548640" y="3931920"/>
-            <a:ext cx="3566160" cy="1371600"/>
-          </a:xfrm>
-          <a:prstGeom prst="roundRect">
-            <a:avLst/>
-          </a:prstGeom>
           <a:solidFill>
-            <a:srgbClr val="FFFFFF"/>
+            <a:srgbClr val="D9E2EC"/>
           </a:solidFill>
-          <a:ln w="12700">
+          <a:ln w="15875">
             <a:solidFill>
-              <a:srgbClr val="2E6FB5"/>
+              <a:srgbClr val="A9BCD0"/>
             </a:solidFill>
           </a:ln>
           <a:effectLst/>
@@ -5192,203 +6484,41 @@
           <a:bodyPr rtlCol="0" anchor="ctr" wrap="square" lIns="101600" rIns="101600" tIns="50800" bIns="50800"/>
           <a:lstStyle/>
           <a:p>
-            <a:pPr algn="l">
-              <a:spcBef>
-                <a:spcPts val="0"/>
-              </a:spcBef>
-              <a:spcAft>
-                <a:spcPts val="300"/>
-              </a:spcAft>
-            </a:pPr>
-            <a:r>
-              <a:rPr sz="1400" b="1">
-                <a:solidFill>
-                  <a:srgbClr val="2E6FB5"/>
-                </a:solidFill>
-                <a:latin typeface="Yu Gothic"/>
-              </a:rPr>
-              <a:t>① 全体の見える化</a:t>
-            </a:r>
-          </a:p>
-          <a:p>
-            <a:pPr algn="l">
-              <a:spcBef>
-                <a:spcPts val="0"/>
-              </a:spcBef>
-              <a:spcAft>
-                <a:spcPts val="300"/>
-              </a:spcAft>
-            </a:pPr>
-            <a:r>
-              <a:rPr sz="1200" b="0">
-                <a:solidFill>
-                  <a:srgbClr val="555555"/>
-                </a:solidFill>
-                <a:latin typeface="Yu Gothic"/>
-              </a:rPr>
-              <a:t>「いつ・何を」やるか全体を設計し、的確なプロジェクト管理を実現。</a:t>
-            </a:r>
-          </a:p>
-        </p:txBody>
-      </p:sp>
-      <p:sp>
-        <p:nvSpPr>
-          <p:cNvPr id="10" name="Rounded Rectangle 9"/>
-          <p:cNvSpPr/>
-          <p:nvPr/>
-        </p:nvSpPr>
-        <p:spPr>
-          <a:xfrm>
-            <a:off x="4297680" y="3931920"/>
-            <a:ext cx="3566160" cy="1371600"/>
-          </a:xfrm>
-          <a:prstGeom prst="roundRect">
-            <a:avLst/>
-          </a:prstGeom>
-          <a:solidFill>
-            <a:srgbClr val="FFFFFF"/>
-          </a:solidFill>
-          <a:ln w="12700">
-            <a:solidFill>
-              <a:srgbClr val="2E6FB5"/>
-            </a:solidFill>
-          </a:ln>
-          <a:effectLst/>
-        </p:spPr>
-        <p:style>
-          <a:lnRef idx="1">
-            <a:schemeClr val="accent1"/>
-          </a:lnRef>
-          <a:fillRef idx="3">
-            <a:schemeClr val="accent1"/>
-          </a:fillRef>
-          <a:effectRef idx="2">
-            <a:schemeClr val="accent1"/>
-          </a:effectRef>
-          <a:fontRef idx="minor">
-            <a:schemeClr val="lt1"/>
-          </a:fontRef>
-        </p:style>
-        <p:txBody>
-          <a:bodyPr rtlCol="0" anchor="ctr" wrap="square" lIns="101600" rIns="101600" tIns="50800" bIns="50800"/>
-          <a:lstStyle/>
-          <a:p>
-            <a:pPr algn="l">
-              <a:spcBef>
-                <a:spcPts val="0"/>
-              </a:spcBef>
-              <a:spcAft>
-                <a:spcPts val="300"/>
-              </a:spcAft>
-            </a:pPr>
-            <a:r>
-              <a:rPr sz="1400" b="1">
-                <a:solidFill>
-                  <a:srgbClr val="2E6FB5"/>
-                </a:solidFill>
-                <a:latin typeface="Yu Gothic"/>
-              </a:rPr>
-              <a:t>② CFのプロが戦略立案</a:t>
-            </a:r>
-          </a:p>
-          <a:p>
-            <a:pPr algn="l">
-              <a:spcBef>
-                <a:spcPts val="0"/>
-              </a:spcBef>
-              <a:spcAft>
-                <a:spcPts val="300"/>
-              </a:spcAft>
-            </a:pPr>
-            <a:r>
-              <a:rPr sz="1200" b="0">
-                <a:solidFill>
-                  <a:srgbClr val="555555"/>
-                </a:solidFill>
-                <a:latin typeface="Yu Gothic"/>
-              </a:rPr>
-              <a:t>元自治体職員・元サイト運営者・ファンドレイザーが戦略を立案。</a:t>
-            </a:r>
-          </a:p>
-        </p:txBody>
-      </p:sp>
-      <p:sp>
-        <p:nvSpPr>
-          <p:cNvPr id="11" name="Rounded Rectangle 10"/>
-          <p:cNvSpPr/>
-          <p:nvPr/>
-        </p:nvSpPr>
-        <p:spPr>
-          <a:xfrm>
-            <a:off x="8046720" y="3931920"/>
-            <a:ext cx="3566160" cy="1371600"/>
-          </a:xfrm>
-          <a:prstGeom prst="roundRect">
-            <a:avLst/>
-          </a:prstGeom>
-          <a:solidFill>
-            <a:srgbClr val="FFFFFF"/>
-          </a:solidFill>
-          <a:ln w="12700">
-            <a:solidFill>
-              <a:srgbClr val="2E6FB5"/>
-            </a:solidFill>
-          </a:ln>
-          <a:effectLst/>
-        </p:spPr>
-        <p:style>
-          <a:lnRef idx="1">
-            <a:schemeClr val="accent1"/>
-          </a:lnRef>
-          <a:fillRef idx="3">
-            <a:schemeClr val="accent1"/>
-          </a:fillRef>
-          <a:effectRef idx="2">
-            <a:schemeClr val="accent1"/>
-          </a:effectRef>
-          <a:fontRef idx="minor">
-            <a:schemeClr val="lt1"/>
-          </a:fontRef>
-        </p:style>
-        <p:txBody>
-          <a:bodyPr rtlCol="0" anchor="ctr" wrap="square" lIns="101600" rIns="101600" tIns="50800" bIns="50800"/>
-          <a:lstStyle/>
-          <a:p>
-            <a:pPr algn="l">
-              <a:spcBef>
-                <a:spcPts val="0"/>
-              </a:spcBef>
-              <a:spcAft>
-                <a:spcPts val="300"/>
-              </a:spcAft>
-            </a:pPr>
-            <a:r>
-              <a:rPr sz="1400" b="1">
-                <a:solidFill>
-                  <a:srgbClr val="2E6FB5"/>
-                </a:solidFill>
-                <a:latin typeface="Yu Gothic"/>
-              </a:rPr>
-              <a:t>③ 最後まで寄り添う伴走力</a:t>
-            </a:r>
-          </a:p>
-          <a:p>
-            <a:pPr algn="l">
-              <a:spcBef>
-                <a:spcPts val="0"/>
-              </a:spcBef>
-              <a:spcAft>
-                <a:spcPts val="300"/>
-              </a:spcAft>
-            </a:pPr>
-            <a:r>
-              <a:rPr sz="1200" b="0">
-                <a:solidFill>
-                  <a:srgbClr val="555555"/>
-                </a:solidFill>
-                <a:latin typeface="Yu Gothic"/>
-              </a:rPr>
-              <a:t>密なコミュニケーションと進行管理で一人にしません。</a:t>
+            <a:pPr algn="ctr">
+              <a:spcBef>
+                <a:spcPts val="0"/>
+              </a:spcBef>
+              <a:spcAft>
+                <a:spcPts val="300"/>
+              </a:spcAft>
+            </a:pPr>
+            <a:r>
+              <a:rPr sz="1300" b="1">
+                <a:solidFill>
+                  <a:srgbClr val="6B7B8C"/>
+                </a:solidFill>
+                <a:latin typeface="Yu Gothic"/>
+              </a:rPr>
+              <a:t>［写真枠］</a:t>
+            </a:r>
+          </a:p>
+          <a:p>
+            <a:pPr algn="ctr">
+              <a:spcBef>
+                <a:spcPts val="0"/>
+              </a:spcBef>
+              <a:spcAft>
+                <a:spcPts val="300"/>
+              </a:spcAft>
+            </a:pPr>
+            <a:r>
+              <a:rPr sz="1100" b="0">
+                <a:solidFill>
+                  <a:srgbClr val="6B7B8C"/>
+                </a:solidFill>
+                <a:latin typeface="Yu Gothic"/>
+              </a:rPr>
+              <a:t>セミナー・相談会の様子</a:t>
             </a:r>
           </a:p>
         </p:txBody>
@@ -5401,8 +6531,8 @@
         </p:nvSpPr>
         <p:spPr>
           <a:xfrm>
-            <a:off x="548640" y="5532120"/>
-            <a:ext cx="11064240" cy="960120"/>
+            <a:off x="548640" y="5577840"/>
+            <a:ext cx="11064240" cy="777240"/>
           </a:xfrm>
           <a:prstGeom prst="roundRect">
             <a:avLst/>
@@ -5442,13 +6572,13 @@
               </a:spcAft>
             </a:pPr>
             <a:r>
-              <a:rPr sz="1600" b="1">
+              <a:rPr sz="1300" b="0">
                 <a:solidFill>
                   <a:srgbClr val="FFFFFF"/>
                 </a:solidFill>
                 <a:latin typeface="Yu Gothic"/>
               </a:rPr>
-              <a:t>ご相談・お問い合わせ</a:t>
+              <a:t>ご相談・お問い合わせ　｜　状況に応じてサポート内容は柔軟に変更可能です。雑談レベルでもお気軽にどうぞ。</a:t>
             </a:r>
           </a:p>
           <a:p>
@@ -5461,32 +6591,97 @@
               </a:spcAft>
             </a:pPr>
             <a:r>
-              <a:rPr sz="1300" b="0">
+              <a:rPr sz="1400" b="1">
                 <a:solidFill>
                   <a:srgbClr val="FFFFFF"/>
                 </a:solidFill>
                 <a:latin typeface="Yu Gothic"/>
               </a:rPr>
-              <a:t>状況に応じてサポート内容は柔軟に変更可能です。雑談レベルでもお気軽にどうぞ。</a:t>
-            </a:r>
-          </a:p>
-          <a:p>
-            <a:pPr algn="ctr">
-              <a:spcBef>
-                <a:spcPts val="0"/>
-              </a:spcBef>
-              <a:spcAft>
-                <a:spcPts val="300"/>
-              </a:spcAft>
-            </a:pPr>
-            <a:r>
-              <a:rPr sz="1400" b="1">
-                <a:solidFill>
-                  <a:srgbClr val="FFFFFF"/>
-                </a:solidFill>
-                <a:latin typeface="Yu Gothic"/>
-              </a:rPr>
               <a:t>担当：佐近　／　メール：info@kita1.jp</a:t>
+            </a:r>
+          </a:p>
+        </p:txBody>
+      </p:sp>
+      <p:sp>
+        <p:nvSpPr>
+          <p:cNvPr id="13" name="TextBox 12"/>
+          <p:cNvSpPr txBox="1"/>
+          <p:nvPr/>
+        </p:nvSpPr>
+        <p:spPr>
+          <a:xfrm>
+            <a:off x="548640" y="6446520"/>
+            <a:ext cx="7315200" cy="320040"/>
+          </a:xfrm>
+          <a:prstGeom prst="rect">
+            <a:avLst/>
+          </a:prstGeom>
+          <a:noFill/>
+        </p:spPr>
+        <p:txBody>
+          <a:bodyPr wrap="square" anchor="t" lIns="101600" rIns="101600" tIns="50800" bIns="50800">
+            <a:spAutoFit/>
+          </a:bodyPr>
+          <a:lstStyle/>
+          <a:p>
+            <a:pPr algn="l">
+              <a:spcBef>
+                <a:spcPts val="0"/>
+              </a:spcBef>
+              <a:spcAft>
+                <a:spcPts val="300"/>
+              </a:spcAft>
+            </a:pPr>
+            <a:r>
+              <a:rPr sz="900" b="0">
+                <a:solidFill>
+                  <a:srgbClr val="555555"/>
+                </a:solidFill>
+                <a:latin typeface="Yu Gothic"/>
+              </a:rPr>
+              <a:t>株式会社KITAICHI　地域おこし協力隊向け クラウドファンディング活用のご提案</a:t>
+            </a:r>
+          </a:p>
+        </p:txBody>
+      </p:sp>
+      <p:sp>
+        <p:nvSpPr>
+          <p:cNvPr id="14" name="TextBox 13"/>
+          <p:cNvSpPr txBox="1"/>
+          <p:nvPr/>
+        </p:nvSpPr>
+        <p:spPr>
+          <a:xfrm>
+            <a:off x="10972800" y="6446520"/>
+            <a:ext cx="822960" cy="320040"/>
+          </a:xfrm>
+          <a:prstGeom prst="rect">
+            <a:avLst/>
+          </a:prstGeom>
+          <a:noFill/>
+        </p:spPr>
+        <p:txBody>
+          <a:bodyPr wrap="square" anchor="t" lIns="101600" rIns="101600" tIns="50800" bIns="50800">
+            <a:spAutoFit/>
+          </a:bodyPr>
+          <a:lstStyle/>
+          <a:p>
+            <a:pPr algn="r">
+              <a:spcBef>
+                <a:spcPts val="0"/>
+              </a:spcBef>
+              <a:spcAft>
+                <a:spcPts val="300"/>
+              </a:spcAft>
+            </a:pPr>
+            <a:r>
+              <a:rPr sz="1000" b="1">
+                <a:solidFill>
+                  <a:srgbClr val="555555"/>
+                </a:solidFill>
+                <a:latin typeface="Yu Gothic"/>
+              </a:rPr>
+              <a:t>4</a:t>
             </a:r>
           </a:p>
         </p:txBody>
